--- a/2024-25-13-evfolyam/ikt-I/masodik csoport munka.pptx
+++ b/2024-25-13-evfolyam/ikt-I/masodik csoport munka.pptx
@@ -13,21 +13,19 @@
     <p:sldId id="257" r:id="rId7"/>
     <p:sldId id="268" r:id="rId8"/>
     <p:sldId id="269" r:id="rId9"/>
-    <p:sldId id="258" r:id="rId10"/>
-    <p:sldId id="259" r:id="rId11"/>
-    <p:sldId id="260" r:id="rId12"/>
-    <p:sldId id="261" r:id="rId13"/>
-    <p:sldId id="262" r:id="rId14"/>
-    <p:sldId id="270" r:id="rId15"/>
-    <p:sldId id="271" r:id="rId16"/>
-    <p:sldId id="274" r:id="rId17"/>
-    <p:sldId id="263" r:id="rId18"/>
-    <p:sldId id="264" r:id="rId19"/>
-    <p:sldId id="265" r:id="rId20"/>
-    <p:sldId id="266" r:id="rId21"/>
-    <p:sldId id="275" r:id="rId22"/>
-    <p:sldId id="276" r:id="rId23"/>
-    <p:sldId id="267" r:id="rId24"/>
+    <p:sldId id="259" r:id="rId10"/>
+    <p:sldId id="260" r:id="rId11"/>
+    <p:sldId id="261" r:id="rId12"/>
+    <p:sldId id="262" r:id="rId13"/>
+    <p:sldId id="270" r:id="rId14"/>
+    <p:sldId id="271" r:id="rId15"/>
+    <p:sldId id="274" r:id="rId16"/>
+    <p:sldId id="263" r:id="rId17"/>
+    <p:sldId id="275" r:id="rId18"/>
+    <p:sldId id="276" r:id="rId19"/>
+    <p:sldId id="277" r:id="rId20"/>
+    <p:sldId id="278" r:id="rId21"/>
+    <p:sldId id="267" r:id="rId22"/>
   </p:sldIdLst>
   <p:sldSz cx="10080625" cy="5670550"/>
   <p:notesSz cx="7559675" cy="10691813"/>
@@ -126,6 +124,11 @@
       </a:defRPr>
     </a:lvl9pPr>
   </p:defaultTextStyle>
+  <p:extLst>
+    <p:ext uri="{EFAFB233-063F-42B5-8137-9DF3F51BA10A}">
+      <p15:sldGuideLst xmlns:p15="http://schemas.microsoft.com/office/powerpoint/2012/main"/>
+    </p:ext>
+  </p:extLst>
 </p:presentation>
 </file>
 
@@ -5706,11 +5709,14 @@
               </a:rPr>
               <a:t>ProjektMunka</a:t>
             </a:r>
-            <a:endParaRPr lang="hu-HU" sz="5600" b="1" u="none" strike="noStrike" dirty="0">
-              <a:effectLst/>
-              <a:uFillTx/>
-              <a:latin typeface="Arial"/>
-            </a:endParaRPr>
+            <a:r>
+              <a:rPr lang="hu-HU" sz="5600" b="1" u="none" strike="noStrike" dirty="0">
+                <a:effectLst/>
+                <a:uFillTx/>
+                <a:latin typeface="Arial"/>
+              </a:rPr>
+              <a:t> 02.</a:t>
+            </a:r>
           </a:p>
         </p:txBody>
       </p:sp>
@@ -5798,7 +5804,7 @@
         <p:cNvPr id="1" name="">
           <a:extLst>
             <a:ext uri="{FF2B5EF4-FFF2-40B4-BE49-F238E27FC236}">
-              <a16:creationId xmlns:a16="http://schemas.microsoft.com/office/drawing/2014/main" id="{71B4D62C-B95C-67A1-1D8F-1C5845364D5E}"/>
+              <a16:creationId xmlns:a16="http://schemas.microsoft.com/office/drawing/2014/main" id="{CEE192DE-8A37-09CA-300A-64CD805C06B8}"/>
             </a:ext>
           </a:extLst>
         </p:cNvPr>
@@ -5815,7 +5821,7 @@
       </p:grpSpPr>
       <p:sp>
         <p:nvSpPr>
-          <p:cNvPr id="69" name="Down Arrow 7">
+          <p:cNvPr id="68" name="Down Arrow 7">
             <a:extLst>
               <a:ext uri="{FF2B5EF4-FFF2-40B4-BE49-F238E27FC236}">
                 <a16:creationId xmlns:a16="http://schemas.microsoft.com/office/drawing/2014/main" id="{D4771268-CB57-404A-9271-370EB28F6090}"/>
@@ -5884,7 +5890,7 @@
           <p:cNvPr id="63" name="PlaceHolder 1">
             <a:extLst>
               <a:ext uri="{FF2B5EF4-FFF2-40B4-BE49-F238E27FC236}">
-                <a16:creationId xmlns:a16="http://schemas.microsoft.com/office/drawing/2014/main" id="{238E0EC9-2E53-C0D9-36E3-9E3B32A2F6DD}"/>
+                <a16:creationId xmlns:a16="http://schemas.microsoft.com/office/drawing/2014/main" id="{FA94E495-28E8-8D94-3C9B-6FA23C98140A}"/>
               </a:ext>
             </a:extLst>
           </p:cNvPr>
@@ -5911,139 +5917,64 @@
           </a:bodyPr>
           <a:lstStyle/>
           <a:p>
-            <a:pPr indent="0" algn="ctr"/>
-            <a:r>
-              <a:rPr lang="en-US" sz="2300" b="1" u="none" strike="noStrike" kern="1200">
+            <a:pPr algn="ctr"/>
+            <a:r>
+              <a:rPr lang="en-US" sz="2100" b="1" i="0" kern="1200">
                 <a:solidFill>
                   <a:srgbClr val="FFFFFF"/>
                 </a:solidFill>
                 <a:effectLst/>
-                <a:uFillTx/>
                 <a:latin typeface="+mj-lt"/>
                 <a:ea typeface="+mj-ea"/>
                 <a:cs typeface="+mj-cs"/>
               </a:rPr>
-              <a:t>3. Kurzusok és azok oktatói, </a:t>
-            </a:r>
-            <a:br>
-              <a:rPr lang="en-US" sz="2300" kern="1200">
-                <a:solidFill>
-                  <a:srgbClr val="FFFFFF"/>
-                </a:solidFill>
-                <a:latin typeface="+mj-lt"/>
-                <a:ea typeface="+mj-ea"/>
-                <a:cs typeface="+mj-cs"/>
-              </a:rPr>
-            </a:br>
-            <a:r>
-              <a:rPr lang="en-US" sz="2300" b="1" u="none" strike="noStrike" kern="1200">
-                <a:solidFill>
-                  <a:srgbClr val="FFFFFF"/>
-                </a:solidFill>
-                <a:effectLst/>
-                <a:uFillTx/>
-                <a:latin typeface="+mj-lt"/>
-                <a:ea typeface="+mj-ea"/>
-                <a:cs typeface="+mj-cs"/>
-              </a:rPr>
-              <a:t>akik legalább 3 kurzust tanítanak</a:t>
+              <a:t>4. Legnépszerűbb kurzusok listája</a:t>
             </a:r>
           </a:p>
         </p:txBody>
       </p:sp>
       <p:pic>
         <p:nvPicPr>
-          <p:cNvPr id="64" name="Kép 63">
+          <p:cNvPr id="4" name="Kép 3" descr="A képen szöveg, képernyőkép, szoftver, Multimédiás szoftver látható&#10;&#10;Előfordulhat, hogy a mesterséges intelligencia által létrehozott tartalom helytelen.">
             <a:extLst>
               <a:ext uri="{FF2B5EF4-FFF2-40B4-BE49-F238E27FC236}">
-                <a16:creationId xmlns:a16="http://schemas.microsoft.com/office/drawing/2014/main" id="{F6D05772-670D-F412-08C2-3FDDFCBDBC3D}"/>
+                <a16:creationId xmlns:a16="http://schemas.microsoft.com/office/drawing/2014/main" id="{D3DB9ABB-CD7D-5CD1-58ED-5E9041845BAF}"/>
               </a:ext>
             </a:extLst>
           </p:cNvPr>
-          <p:cNvPicPr/>
+          <p:cNvPicPr>
+            <a:picLocks noChangeAspect="1"/>
+          </p:cNvPicPr>
           <p:nvPr/>
         </p:nvPicPr>
         <p:blipFill>
-          <a:blip r:embed="rId2"/>
-          <a:stretch/>
+          <a:blip r:embed="rId2">
+            <a:extLst>
+              <a:ext uri="{28A0092B-C50C-407E-A947-70E740481C1C}">
+                <a14:useLocalDpi xmlns:a14="http://schemas.microsoft.com/office/drawing/2010/main" val="0"/>
+              </a:ext>
+            </a:extLst>
+          </a:blip>
+          <a:stretch>
+            <a:fillRect/>
+          </a:stretch>
         </p:blipFill>
         <p:spPr>
           <a:xfrm>
-            <a:off x="3949994" y="907099"/>
-            <a:ext cx="5606438" cy="3854426"/>
+            <a:off x="3949994" y="640793"/>
+            <a:ext cx="5606438" cy="4387037"/>
           </a:xfrm>
           <a:prstGeom prst="rect">
             <a:avLst/>
           </a:prstGeom>
-          <a:noFill/>
         </p:spPr>
       </p:pic>
       <p:sp>
         <p:nvSpPr>
-          <p:cNvPr id="3" name="PlaceHolder 2">
+          <p:cNvPr id="5" name="PlaceHolder 2">
             <a:extLst>
               <a:ext uri="{FF2B5EF4-FFF2-40B4-BE49-F238E27FC236}">
-                <a16:creationId xmlns:a16="http://schemas.microsoft.com/office/drawing/2014/main" id="{2FC3D320-441A-56B3-4C11-D0AC98AD9366}"/>
-              </a:ext>
-            </a:extLst>
-          </p:cNvPr>
-          <p:cNvSpPr>
-            <a:spLocks noGrp="1"/>
-          </p:cNvSpPr>
-          <p:nvPr>
-            <p:ph type="sldNum" idx="9"/>
-          </p:nvPr>
-        </p:nvSpPr>
-        <p:spPr>
-          <a:xfrm>
-            <a:off x="9123316" y="5255759"/>
-            <a:ext cx="425275" cy="301905"/>
-          </a:xfrm>
-        </p:spPr>
-        <p:txBody>
-          <a:bodyPr vert="horz" lIns="91440" tIns="45720" rIns="91440" bIns="45720" rtlCol="0" anchor="ctr">
-            <a:normAutofit/>
-          </a:bodyPr>
-          <a:lstStyle/>
-          <a:p>
-            <a:pPr>
-              <a:spcAft>
-                <a:spcPts val="600"/>
-              </a:spcAft>
-            </a:pPr>
-            <a:fld id="{B87A8573-86D2-47CB-8356-882D760F769D}" type="slidenum">
-              <a:rPr lang="en-US" sz="1200">
-                <a:solidFill>
-                  <a:schemeClr val="tx1">
-                    <a:alpha val="80000"/>
-                  </a:schemeClr>
-                </a:solidFill>
-                <a:latin typeface="+mn-lt"/>
-              </a:rPr>
-              <a:pPr>
-                <a:spcAft>
-                  <a:spcPts val="600"/>
-                </a:spcAft>
-              </a:pPr>
-              <a:t>10</a:t>
-            </a:fld>
-            <a:endParaRPr lang="en-US" sz="1200">
-              <a:solidFill>
-                <a:schemeClr val="tx1">
-                  <a:alpha val="80000"/>
-                </a:schemeClr>
-              </a:solidFill>
-              <a:latin typeface="+mn-lt"/>
-            </a:endParaRPr>
-          </a:p>
-        </p:txBody>
-      </p:sp>
-      <p:sp>
-        <p:nvSpPr>
-          <p:cNvPr id="2" name="PlaceHolder 2">
-            <a:extLst>
-              <a:ext uri="{FF2B5EF4-FFF2-40B4-BE49-F238E27FC236}">
-                <a16:creationId xmlns:a16="http://schemas.microsoft.com/office/drawing/2014/main" id="{05D92EF1-4F51-3334-AD2C-181343490429}"/>
+                <a16:creationId xmlns:a16="http://schemas.microsoft.com/office/drawing/2014/main" id="{DA0B4172-AB93-DD38-B099-93D39F95A569}"/>
               </a:ext>
             </a:extLst>
           </p:cNvPr>
@@ -6054,8 +5985,8 @@
         </p:nvSpPr>
         <p:spPr>
           <a:xfrm>
-            <a:off x="9023088" y="4998820"/>
-            <a:ext cx="745981" cy="301905"/>
+            <a:off x="9190998" y="5104806"/>
+            <a:ext cx="730867" cy="301905"/>
           </a:xfrm>
           <a:prstGeom prst="rect">
             <a:avLst/>
@@ -6203,7 +6134,7 @@
     </p:spTree>
     <p:extLst>
       <p:ext uri="{BB962C8B-B14F-4D97-AF65-F5344CB8AC3E}">
-        <p14:creationId xmlns:p14="http://schemas.microsoft.com/office/powerpoint/2010/main" val="3005154695"/>
+        <p14:creationId xmlns:p14="http://schemas.microsoft.com/office/powerpoint/2010/main" val="762607526"/>
       </p:ext>
     </p:extLst>
   </p:cSld>
@@ -6241,374 +6172,6 @@
         <p:cNvPr id="1" name="">
           <a:extLst>
             <a:ext uri="{FF2B5EF4-FFF2-40B4-BE49-F238E27FC236}">
-              <a16:creationId xmlns:a16="http://schemas.microsoft.com/office/drawing/2014/main" id="{CEE192DE-8A37-09CA-300A-64CD805C06B8}"/>
-            </a:ext>
-          </a:extLst>
-        </p:cNvPr>
-        <p:cNvGrpSpPr/>
-        <p:nvPr/>
-      </p:nvGrpSpPr>
-      <p:grpSpPr>
-        <a:xfrm>
-          <a:off x="0" y="0"/>
-          <a:ext cx="0" cy="0"/>
-          <a:chOff x="0" y="0"/>
-          <a:chExt cx="0" cy="0"/>
-        </a:xfrm>
-      </p:grpSpPr>
-      <p:sp>
-        <p:nvSpPr>
-          <p:cNvPr id="68" name="Down Arrow 7">
-            <a:extLst>
-              <a:ext uri="{FF2B5EF4-FFF2-40B4-BE49-F238E27FC236}">
-                <a16:creationId xmlns:a16="http://schemas.microsoft.com/office/drawing/2014/main" id="{D4771268-CB57-404A-9271-370EB28F6090}"/>
-              </a:ext>
-              <a:ext uri="{C183D7F6-B498-43B3-948B-1728B52AA6E4}">
-                <adec:decorative xmlns:adec="http://schemas.microsoft.com/office/drawing/2017/decorative" val="1"/>
-              </a:ext>
-            </a:extLst>
-          </p:cNvPr>
-          <p:cNvSpPr>
-            <a:spLocks noGrp="1" noRot="1" noChangeAspect="1" noMove="1" noResize="1" noEditPoints="1" noAdjustHandles="1" noChangeArrowheads="1" noChangeShapeType="1" noTextEdit="1"/>
-          </p:cNvSpPr>
-          <p:nvPr>
-            <p:extLst>
-              <p:ext uri="{386F3935-93C4-4BCD-93E2-E3B085C9AB24}">
-                <p16:designElem xmlns:p16="http://schemas.microsoft.com/office/powerpoint/2015/main" val="1"/>
-              </p:ext>
-            </p:extLst>
-          </p:nvPr>
-        </p:nvSpPr>
-        <p:spPr>
-          <a:xfrm rot="16200000">
-            <a:off x="661493" y="1233170"/>
-            <a:ext cx="2756517" cy="2893139"/>
-          </a:xfrm>
-          <a:prstGeom prst="downArrow">
-            <a:avLst>
-              <a:gd name="adj1" fmla="val 100000"/>
-              <a:gd name="adj2" fmla="val 15788"/>
-            </a:avLst>
-          </a:prstGeom>
-          <a:solidFill>
-            <a:srgbClr val="404040"/>
-          </a:solidFill>
-          <a:ln w="53975">
-            <a:noFill/>
-          </a:ln>
-        </p:spPr>
-        <p:style>
-          <a:lnRef idx="2">
-            <a:schemeClr val="accent1">
-              <a:shade val="50000"/>
-            </a:schemeClr>
-          </a:lnRef>
-          <a:fillRef idx="1">
-            <a:schemeClr val="accent1"/>
-          </a:fillRef>
-          <a:effectRef idx="0">
-            <a:schemeClr val="accent1"/>
-          </a:effectRef>
-          <a:fontRef idx="minor">
-            <a:schemeClr val="lt1"/>
-          </a:fontRef>
-        </p:style>
-        <p:txBody>
-          <a:bodyPr rtlCol="0" anchor="ctr"/>
-          <a:lstStyle/>
-          <a:p>
-            <a:pPr algn="ctr"/>
-            <a:endParaRPr lang="en-US"/>
-          </a:p>
-        </p:txBody>
-      </p:sp>
-      <p:sp>
-        <p:nvSpPr>
-          <p:cNvPr id="63" name="PlaceHolder 1">
-            <a:extLst>
-              <a:ext uri="{FF2B5EF4-FFF2-40B4-BE49-F238E27FC236}">
-                <a16:creationId xmlns:a16="http://schemas.microsoft.com/office/drawing/2014/main" id="{FA94E495-28E8-8D94-3C9B-6FA23C98140A}"/>
-              </a:ext>
-            </a:extLst>
-          </p:cNvPr>
-          <p:cNvSpPr>
-            <a:spLocks noGrp="1"/>
-          </p:cNvSpPr>
-          <p:nvPr>
-            <p:ph type="title"/>
-          </p:nvPr>
-        </p:nvSpPr>
-        <p:spPr>
-          <a:xfrm>
-            <a:off x="850552" y="1626637"/>
-            <a:ext cx="2173635" cy="2106204"/>
-          </a:xfrm>
-          <a:prstGeom prst="rect">
-            <a:avLst/>
-          </a:prstGeom>
-          <a:noFill/>
-        </p:spPr>
-        <p:txBody>
-          <a:bodyPr vert="horz" lIns="91440" tIns="45720" rIns="91440" bIns="45720" rtlCol="0" anchor="ctr">
-            <a:normAutofit/>
-          </a:bodyPr>
-          <a:lstStyle/>
-          <a:p>
-            <a:pPr algn="ctr"/>
-            <a:r>
-              <a:rPr lang="en-US" sz="2100" b="1" i="0" kern="1200">
-                <a:solidFill>
-                  <a:srgbClr val="FFFFFF"/>
-                </a:solidFill>
-                <a:effectLst/>
-                <a:latin typeface="+mj-lt"/>
-                <a:ea typeface="+mj-ea"/>
-                <a:cs typeface="+mj-cs"/>
-              </a:rPr>
-              <a:t>4. Legnépszerűbb kurzusok listája</a:t>
-            </a:r>
-          </a:p>
-        </p:txBody>
-      </p:sp>
-      <p:pic>
-        <p:nvPicPr>
-          <p:cNvPr id="4" name="Kép 3" descr="A képen szöveg, képernyőkép, szoftver, Multimédiás szoftver látható&#10;&#10;Előfordulhat, hogy a mesterséges intelligencia által létrehozott tartalom helytelen.">
-            <a:extLst>
-              <a:ext uri="{FF2B5EF4-FFF2-40B4-BE49-F238E27FC236}">
-                <a16:creationId xmlns:a16="http://schemas.microsoft.com/office/drawing/2014/main" id="{D3DB9ABB-CD7D-5CD1-58ED-5E9041845BAF}"/>
-              </a:ext>
-            </a:extLst>
-          </p:cNvPr>
-          <p:cNvPicPr>
-            <a:picLocks noChangeAspect="1"/>
-          </p:cNvPicPr>
-          <p:nvPr/>
-        </p:nvPicPr>
-        <p:blipFill>
-          <a:blip r:embed="rId2">
-            <a:extLst>
-              <a:ext uri="{28A0092B-C50C-407E-A947-70E740481C1C}">
-                <a14:useLocalDpi xmlns:a14="http://schemas.microsoft.com/office/drawing/2010/main" val="0"/>
-              </a:ext>
-            </a:extLst>
-          </a:blip>
-          <a:stretch>
-            <a:fillRect/>
-          </a:stretch>
-        </p:blipFill>
-        <p:spPr>
-          <a:xfrm>
-            <a:off x="3949994" y="640793"/>
-            <a:ext cx="5606438" cy="4387037"/>
-          </a:xfrm>
-          <a:prstGeom prst="rect">
-            <a:avLst/>
-          </a:prstGeom>
-        </p:spPr>
-      </p:pic>
-      <p:sp>
-        <p:nvSpPr>
-          <p:cNvPr id="5" name="PlaceHolder 2">
-            <a:extLst>
-              <a:ext uri="{FF2B5EF4-FFF2-40B4-BE49-F238E27FC236}">
-                <a16:creationId xmlns:a16="http://schemas.microsoft.com/office/drawing/2014/main" id="{DA0B4172-AB93-DD38-B099-93D39F95A569}"/>
-              </a:ext>
-            </a:extLst>
-          </p:cNvPr>
-          <p:cNvSpPr txBox="1">
-            <a:spLocks/>
-          </p:cNvSpPr>
-          <p:nvPr/>
-        </p:nvSpPr>
-        <p:spPr>
-          <a:xfrm>
-            <a:off x="9190998" y="5104806"/>
-            <a:ext cx="730867" cy="301905"/>
-          </a:xfrm>
-          <a:prstGeom prst="rect">
-            <a:avLst/>
-          </a:prstGeom>
-          <a:noFill/>
-          <a:ln w="0">
-            <a:noFill/>
-          </a:ln>
-        </p:spPr>
-        <p:txBody>
-          <a:bodyPr vert="horz" lIns="91440" tIns="45720" rIns="91440" bIns="45720" rtlCol="0" anchor="ctr">
-            <a:noAutofit/>
-          </a:bodyPr>
-          <a:lstStyle>
-            <a:defPPr>
-              <a:defRPr lang="hu-HU"/>
-            </a:defPPr>
-            <a:lvl1pPr marL="0" indent="0" algn="r" defTabSz="914400" rtl="0" eaLnBrk="1" latinLnBrk="0" hangingPunct="1">
-              <a:buNone/>
-              <a:defRPr lang="hu-HU" sz="2600" b="0" u="none" strike="noStrike" kern="1200">
-                <a:solidFill>
-                  <a:srgbClr val="FFFFFF"/>
-                </a:solidFill>
-                <a:effectLst/>
-                <a:uFillTx/>
-                <a:latin typeface="Arial"/>
-                <a:ea typeface="+mn-ea"/>
-                <a:cs typeface="+mn-cs"/>
-              </a:defRPr>
-            </a:lvl1pPr>
-            <a:lvl2pPr marL="457200" algn="l" defTabSz="914400" rtl="0" eaLnBrk="1" latinLnBrk="0" hangingPunct="1">
-              <a:defRPr sz="1800" kern="1200">
-                <a:solidFill>
-                  <a:schemeClr val="tx1"/>
-                </a:solidFill>
-                <a:latin typeface="+mn-lt"/>
-                <a:ea typeface="+mn-ea"/>
-                <a:cs typeface="+mn-cs"/>
-              </a:defRPr>
-            </a:lvl2pPr>
-            <a:lvl3pPr marL="914400" algn="l" defTabSz="914400" rtl="0" eaLnBrk="1" latinLnBrk="0" hangingPunct="1">
-              <a:defRPr sz="1800" kern="1200">
-                <a:solidFill>
-                  <a:schemeClr val="tx1"/>
-                </a:solidFill>
-                <a:latin typeface="+mn-lt"/>
-                <a:ea typeface="+mn-ea"/>
-                <a:cs typeface="+mn-cs"/>
-              </a:defRPr>
-            </a:lvl3pPr>
-            <a:lvl4pPr marL="1371600" algn="l" defTabSz="914400" rtl="0" eaLnBrk="1" latinLnBrk="0" hangingPunct="1">
-              <a:defRPr sz="1800" kern="1200">
-                <a:solidFill>
-                  <a:schemeClr val="tx1"/>
-                </a:solidFill>
-                <a:latin typeface="+mn-lt"/>
-                <a:ea typeface="+mn-ea"/>
-                <a:cs typeface="+mn-cs"/>
-              </a:defRPr>
-            </a:lvl4pPr>
-            <a:lvl5pPr marL="1828800" algn="l" defTabSz="914400" rtl="0" eaLnBrk="1" latinLnBrk="0" hangingPunct="1">
-              <a:defRPr sz="1800" kern="1200">
-                <a:solidFill>
-                  <a:schemeClr val="tx1"/>
-                </a:solidFill>
-                <a:latin typeface="+mn-lt"/>
-                <a:ea typeface="+mn-ea"/>
-                <a:cs typeface="+mn-cs"/>
-              </a:defRPr>
-            </a:lvl5pPr>
-            <a:lvl6pPr marL="2286000" algn="l" defTabSz="914400" rtl="0" eaLnBrk="1" latinLnBrk="0" hangingPunct="1">
-              <a:defRPr sz="1800" kern="1200">
-                <a:solidFill>
-                  <a:schemeClr val="tx1"/>
-                </a:solidFill>
-                <a:latin typeface="+mn-lt"/>
-                <a:ea typeface="+mn-ea"/>
-                <a:cs typeface="+mn-cs"/>
-              </a:defRPr>
-            </a:lvl6pPr>
-            <a:lvl7pPr marL="2743200" algn="l" defTabSz="914400" rtl="0" eaLnBrk="1" latinLnBrk="0" hangingPunct="1">
-              <a:defRPr sz="1800" kern="1200">
-                <a:solidFill>
-                  <a:schemeClr val="tx1"/>
-                </a:solidFill>
-                <a:latin typeface="+mn-lt"/>
-                <a:ea typeface="+mn-ea"/>
-                <a:cs typeface="+mn-cs"/>
-              </a:defRPr>
-            </a:lvl7pPr>
-            <a:lvl8pPr marL="3200400" algn="l" defTabSz="914400" rtl="0" eaLnBrk="1" latinLnBrk="0" hangingPunct="1">
-              <a:defRPr sz="1800" kern="1200">
-                <a:solidFill>
-                  <a:schemeClr val="tx1"/>
-                </a:solidFill>
-                <a:latin typeface="+mn-lt"/>
-                <a:ea typeface="+mn-ea"/>
-                <a:cs typeface="+mn-cs"/>
-              </a:defRPr>
-            </a:lvl8pPr>
-            <a:lvl9pPr marL="3657600" algn="l" defTabSz="914400" rtl="0" eaLnBrk="1" latinLnBrk="0" hangingPunct="1">
-              <a:defRPr sz="1800" kern="1200">
-                <a:solidFill>
-                  <a:schemeClr val="tx1"/>
-                </a:solidFill>
-                <a:latin typeface="+mn-lt"/>
-                <a:ea typeface="+mn-ea"/>
-                <a:cs typeface="+mn-cs"/>
-              </a:defRPr>
-            </a:lvl9pPr>
-          </a:lstStyle>
-          <a:p>
-            <a:pPr>
-              <a:spcAft>
-                <a:spcPts val="600"/>
-              </a:spcAft>
-            </a:pPr>
-            <a:fld id="{C933FE9D-0909-4844-89F0-81DC191A89A0}" type="slidenum">
-              <a:rPr lang="en-US" smtClean="0">
-                <a:solidFill>
-                  <a:schemeClr val="bg1">
-                    <a:alpha val="80000"/>
-                  </a:schemeClr>
-                </a:solidFill>
-                <a:latin typeface="+mn-lt"/>
-              </a:rPr>
-              <a:pPr>
-                <a:spcAft>
-                  <a:spcPts val="600"/>
-                </a:spcAft>
-              </a:pPr>
-              <a:t>11</a:t>
-            </a:fld>
-            <a:endParaRPr lang="en-US" dirty="0">
-              <a:solidFill>
-                <a:schemeClr val="bg1">
-                  <a:alpha val="80000"/>
-                </a:schemeClr>
-              </a:solidFill>
-              <a:latin typeface="+mn-lt"/>
-            </a:endParaRPr>
-          </a:p>
-        </p:txBody>
-      </p:sp>
-    </p:spTree>
-    <p:extLst>
-      <p:ext uri="{BB962C8B-B14F-4D97-AF65-F5344CB8AC3E}">
-        <p14:creationId xmlns:p14="http://schemas.microsoft.com/office/powerpoint/2010/main" val="762607526"/>
-      </p:ext>
-    </p:extLst>
-  </p:cSld>
-  <p:clrMapOvr>
-    <a:masterClrMapping/>
-  </p:clrMapOvr>
-  <mc:AlternateContent xmlns:mc="http://schemas.openxmlformats.org/markup-compatibility/2006" xmlns:p14="http://schemas.microsoft.com/office/powerpoint/2010/main">
-    <mc:Choice Requires="p14">
-      <p:transition spd="slow" p14:dur="2000">
-        <p:fade/>
-      </p:transition>
-    </mc:Choice>
-    <mc:Fallback xmlns:p15="http://schemas.microsoft.com/office/powerpoint/2012/main" xmlns="">
-      <p:transition spd="slow">
-        <p:fade/>
-      </p:transition>
-    </mc:Fallback>
-  </mc:AlternateContent>
-</p:sld>
-</file>
-
-<file path=ppt/slides/slide12.xml><?xml version="1.0" encoding="utf-8"?>
-<p:sld xmlns:a="http://schemas.openxmlformats.org/drawingml/2006/main" xmlns:r="http://schemas.openxmlformats.org/officeDocument/2006/relationships" xmlns:p="http://schemas.openxmlformats.org/presentationml/2006/main">
-  <p:cSld>
-    <p:bg>
-      <p:bgPr>
-        <a:solidFill>
-          <a:schemeClr val="bg1"/>
-        </a:solidFill>
-        <a:effectLst/>
-      </p:bgPr>
-    </p:bg>
-    <p:spTree>
-      <p:nvGrpSpPr>
-        <p:cNvPr id="1" name="">
-          <a:extLst>
-            <a:ext uri="{FF2B5EF4-FFF2-40B4-BE49-F238E27FC236}">
               <a16:creationId xmlns:a16="http://schemas.microsoft.com/office/drawing/2014/main" id="{94C50996-A7B4-A739-E887-03E4703C8697}"/>
             </a:ext>
           </a:extLst>
@@ -6847,7 +6410,7 @@
         </p:nvSpPr>
         <p:spPr>
           <a:xfrm>
-            <a:off x="9123316" y="4998820"/>
+            <a:off x="9233555" y="5195303"/>
             <a:ext cx="645753" cy="301905"/>
           </a:xfrm>
           <a:prstGeom prst="rect">
@@ -6980,7 +6543,7 @@
                   <a:spcPts val="600"/>
                 </a:spcAft>
               </a:pPr>
-              <a:t>12</a:t>
+              <a:t>11</a:t>
             </a:fld>
             <a:endParaRPr lang="en-US" dirty="0">
               <a:solidFill>
@@ -7018,7 +6581,7 @@
 </p:sld>
 </file>
 
-<file path=ppt/slides/slide13.xml><?xml version="1.0" encoding="utf-8"?>
+<file path=ppt/slides/slide12.xml><?xml version="1.0" encoding="utf-8"?>
 <p:sld xmlns:a="http://schemas.openxmlformats.org/drawingml/2006/main" xmlns:r="http://schemas.openxmlformats.org/officeDocument/2006/relationships" xmlns:p="http://schemas.openxmlformats.org/presentationml/2006/main">
   <p:cSld>
     <p:spTree>
@@ -7129,14 +6692,126 @@
             <p:ph type="sldNum" idx="6"/>
           </p:nvPr>
         </p:nvSpPr>
-        <p:spPr/>
-        <p:txBody>
-          <a:bodyPr/>
-          <a:lstStyle/>
-          <a:p>
-            <a:fld id="{80E7EB9C-BAF3-4E2B-8EA6-4A213D68AAA0}" type="slidenum">
-              <a:rPr/>
-              <a:t>13</a:t>
+        <p:spPr>
+          <a:xfrm>
+            <a:off x="7379640" y="4589640"/>
+            <a:ext cx="2520000" cy="391320"/>
+          </a:xfrm>
+          <a:prstGeom prst="rect">
+            <a:avLst/>
+          </a:prstGeom>
+          <a:noFill/>
+          <a:ln w="0">
+            <a:noFill/>
+          </a:ln>
+        </p:spPr>
+        <p:txBody>
+          <a:bodyPr lIns="0" tIns="0" rIns="0" bIns="0" anchor="t">
+            <a:spAutoFit/>
+          </a:bodyPr>
+          <a:lstStyle>
+            <a:defPPr>
+              <a:defRPr lang="hu-HU"/>
+            </a:defPPr>
+            <a:lvl1pPr marL="0" indent="0" algn="r" defTabSz="914400" rtl="0" eaLnBrk="1" latinLnBrk="0" hangingPunct="1">
+              <a:buNone/>
+              <a:defRPr lang="hu-HU" sz="2600" b="0" u="none" strike="noStrike" kern="1200">
+                <a:solidFill>
+                  <a:srgbClr val="FFFFFF"/>
+                </a:solidFill>
+                <a:effectLst/>
+                <a:uFillTx/>
+                <a:latin typeface="Arial"/>
+                <a:ea typeface="+mn-ea"/>
+                <a:cs typeface="+mn-cs"/>
+              </a:defRPr>
+            </a:lvl1pPr>
+            <a:lvl2pPr marL="457200" algn="l" defTabSz="914400" rtl="0" eaLnBrk="1" latinLnBrk="0" hangingPunct="1">
+              <a:defRPr sz="1800" kern="1200">
+                <a:solidFill>
+                  <a:schemeClr val="tx1"/>
+                </a:solidFill>
+                <a:latin typeface="+mn-lt"/>
+                <a:ea typeface="+mn-ea"/>
+                <a:cs typeface="+mn-cs"/>
+              </a:defRPr>
+            </a:lvl2pPr>
+            <a:lvl3pPr marL="914400" algn="l" defTabSz="914400" rtl="0" eaLnBrk="1" latinLnBrk="0" hangingPunct="1">
+              <a:defRPr sz="1800" kern="1200">
+                <a:solidFill>
+                  <a:schemeClr val="tx1"/>
+                </a:solidFill>
+                <a:latin typeface="+mn-lt"/>
+                <a:ea typeface="+mn-ea"/>
+                <a:cs typeface="+mn-cs"/>
+              </a:defRPr>
+            </a:lvl3pPr>
+            <a:lvl4pPr marL="1371600" algn="l" defTabSz="914400" rtl="0" eaLnBrk="1" latinLnBrk="0" hangingPunct="1">
+              <a:defRPr sz="1800" kern="1200">
+                <a:solidFill>
+                  <a:schemeClr val="tx1"/>
+                </a:solidFill>
+                <a:latin typeface="+mn-lt"/>
+                <a:ea typeface="+mn-ea"/>
+                <a:cs typeface="+mn-cs"/>
+              </a:defRPr>
+            </a:lvl4pPr>
+            <a:lvl5pPr marL="1828800" algn="l" defTabSz="914400" rtl="0" eaLnBrk="1" latinLnBrk="0" hangingPunct="1">
+              <a:defRPr sz="1800" kern="1200">
+                <a:solidFill>
+                  <a:schemeClr val="tx1"/>
+                </a:solidFill>
+                <a:latin typeface="+mn-lt"/>
+                <a:ea typeface="+mn-ea"/>
+                <a:cs typeface="+mn-cs"/>
+              </a:defRPr>
+            </a:lvl5pPr>
+            <a:lvl6pPr marL="2286000" algn="l" defTabSz="914400" rtl="0" eaLnBrk="1" latinLnBrk="0" hangingPunct="1">
+              <a:defRPr sz="1800" kern="1200">
+                <a:solidFill>
+                  <a:schemeClr val="tx1"/>
+                </a:solidFill>
+                <a:latin typeface="+mn-lt"/>
+                <a:ea typeface="+mn-ea"/>
+                <a:cs typeface="+mn-cs"/>
+              </a:defRPr>
+            </a:lvl6pPr>
+            <a:lvl7pPr marL="2743200" algn="l" defTabSz="914400" rtl="0" eaLnBrk="1" latinLnBrk="0" hangingPunct="1">
+              <a:defRPr sz="1800" kern="1200">
+                <a:solidFill>
+                  <a:schemeClr val="tx1"/>
+                </a:solidFill>
+                <a:latin typeface="+mn-lt"/>
+                <a:ea typeface="+mn-ea"/>
+                <a:cs typeface="+mn-cs"/>
+              </a:defRPr>
+            </a:lvl7pPr>
+            <a:lvl8pPr marL="3200400" algn="l" defTabSz="914400" rtl="0" eaLnBrk="1" latinLnBrk="0" hangingPunct="1">
+              <a:defRPr sz="1800" kern="1200">
+                <a:solidFill>
+                  <a:schemeClr val="tx1"/>
+                </a:solidFill>
+                <a:latin typeface="+mn-lt"/>
+                <a:ea typeface="+mn-ea"/>
+                <a:cs typeface="+mn-cs"/>
+              </a:defRPr>
+            </a:lvl8pPr>
+            <a:lvl9pPr marL="3657600" algn="l" defTabSz="914400" rtl="0" eaLnBrk="1" latinLnBrk="0" hangingPunct="1">
+              <a:defRPr sz="1800" kern="1200">
+                <a:solidFill>
+                  <a:schemeClr val="tx1"/>
+                </a:solidFill>
+                <a:latin typeface="+mn-lt"/>
+                <a:ea typeface="+mn-ea"/>
+                <a:cs typeface="+mn-cs"/>
+              </a:defRPr>
+            </a:lvl9pPr>
+          </a:lstStyle>
+          <a:p>
+            <a:fld id="{820C4A36-F351-4405-B005-1D65C9C02EEB}" type="slidenum">
+              <a:rPr lang="hu-HU" smtClean="0"/>
+              <a:pPr/>
+              <a:t>12</a:t>
             </a:fld>
             <a:endParaRPr/>
           </a:p>
@@ -7162,425 +6837,7 @@
 </p:sld>
 </file>
 
-<file path=ppt/slides/slide14.xml><?xml version="1.0" encoding="utf-8"?>
-<p:sld xmlns:a="http://schemas.openxmlformats.org/drawingml/2006/main" xmlns:r="http://schemas.openxmlformats.org/officeDocument/2006/relationships" xmlns:p="http://schemas.openxmlformats.org/presentationml/2006/main">
-  <p:cSld>
-    <p:spTree>
-      <p:nvGrpSpPr>
-        <p:cNvPr id="1" name=""/>
-        <p:cNvGrpSpPr/>
-        <p:nvPr/>
-      </p:nvGrpSpPr>
-      <p:grpSpPr>
-        <a:xfrm>
-          <a:off x="0" y="0"/>
-          <a:ext cx="0" cy="0"/>
-          <a:chOff x="0" y="0"/>
-          <a:chExt cx="0" cy="0"/>
-        </a:xfrm>
-      </p:grpSpPr>
-      <p:sp>
-        <p:nvSpPr>
-          <p:cNvPr id="67" name="PlaceHolder 1"/>
-          <p:cNvSpPr>
-            <a:spLocks noGrp="1"/>
-          </p:cNvSpPr>
-          <p:nvPr>
-            <p:ph type="title"/>
-          </p:nvPr>
-        </p:nvSpPr>
-        <p:spPr>
-          <a:xfrm rot="21111000">
-            <a:off x="67680" y="236721"/>
-            <a:ext cx="9019440" cy="553998"/>
-          </a:xfrm>
-          <a:prstGeom prst="rect">
-            <a:avLst/>
-          </a:prstGeom>
-          <a:noFill/>
-          <a:ln w="0">
-            <a:noFill/>
-          </a:ln>
-        </p:spPr>
-        <p:txBody>
-          <a:bodyPr lIns="0" tIns="0" rIns="0" bIns="0" anchor="ctr">
-            <a:spAutoFit/>
-          </a:bodyPr>
-          <a:lstStyle/>
-          <a:p>
-            <a:pPr indent="0">
-              <a:buNone/>
-            </a:pPr>
-            <a:r>
-              <a:rPr lang="hu-HU" sz="2000" b="1" u="none" strike="noStrike" dirty="0">
-                <a:effectLst/>
-                <a:uFillTx/>
-                <a:latin typeface="Arial"/>
-              </a:rPr>
-              <a:t>2. Oktató kurzus létrehozása, diákok regisztrálása, </a:t>
-            </a:r>
-            <a:br>
-              <a:rPr sz="2000" dirty="0"/>
-            </a:br>
-            <a:r>
-              <a:rPr lang="hu-HU" sz="2000" b="1" u="none" strike="noStrike" dirty="0">
-                <a:effectLst/>
-                <a:uFillTx/>
-                <a:latin typeface="Arial"/>
-              </a:rPr>
-              <a:t>tesztelés hozzáadása</a:t>
-            </a:r>
-          </a:p>
-        </p:txBody>
-      </p:sp>
-      <p:pic>
-        <p:nvPicPr>
-          <p:cNvPr id="68" name="Kép 67"/>
-          <p:cNvPicPr/>
-          <p:nvPr/>
-        </p:nvPicPr>
-        <p:blipFill>
-          <a:blip r:embed="rId2"/>
-          <a:stretch/>
-        </p:blipFill>
-        <p:spPr>
-          <a:xfrm>
-            <a:off x="2520000" y="1080000"/>
-            <a:ext cx="5023080" cy="4382640"/>
-          </a:xfrm>
-          <a:prstGeom prst="rect">
-            <a:avLst/>
-          </a:prstGeom>
-          <a:noFill/>
-          <a:ln w="10800">
-            <a:noFill/>
-          </a:ln>
-        </p:spPr>
-      </p:pic>
-      <p:sp>
-        <p:nvSpPr>
-          <p:cNvPr id="3" name="PlaceHolder 2"/>
-          <p:cNvSpPr>
-            <a:spLocks noGrp="1"/>
-          </p:cNvSpPr>
-          <p:nvPr>
-            <p:ph type="sldNum" idx="9"/>
-          </p:nvPr>
-        </p:nvSpPr>
-        <p:spPr/>
-        <p:txBody>
-          <a:bodyPr/>
-          <a:lstStyle/>
-          <a:p>
-            <a:fld id="{8B65D527-58CB-42B6-80DF-144E74B342B5}" type="slidenum">
-              <a:rPr/>
-              <a:t>14</a:t>
-            </a:fld>
-            <a:endParaRPr/>
-          </a:p>
-        </p:txBody>
-      </p:sp>
-    </p:spTree>
-  </p:cSld>
-  <p:clrMapOvr>
-    <a:masterClrMapping/>
-  </p:clrMapOvr>
-  <mc:AlternateContent xmlns:mc="http://schemas.openxmlformats.org/markup-compatibility/2006" xmlns:p14="http://schemas.microsoft.com/office/powerpoint/2010/main">
-    <mc:Choice Requires="p14">
-      <p:transition spd="slow" p14:dur="2000">
-        <p:fade/>
-      </p:transition>
-    </mc:Choice>
-    <mc:Fallback xmlns:p15="http://schemas.microsoft.com/office/powerpoint/2012/main" xmlns="">
-      <p:transition spd="slow">
-        <p:fade/>
-      </p:transition>
-    </mc:Fallback>
-  </mc:AlternateContent>
-</p:sld>
-</file>
-
-<file path=ppt/slides/slide15.xml><?xml version="1.0" encoding="utf-8"?>
-<p:sld xmlns:a="http://schemas.openxmlformats.org/drawingml/2006/main" xmlns:r="http://schemas.openxmlformats.org/officeDocument/2006/relationships" xmlns:p="http://schemas.openxmlformats.org/presentationml/2006/main">
-  <p:cSld>
-    <p:spTree>
-      <p:nvGrpSpPr>
-        <p:cNvPr id="1" name=""/>
-        <p:cNvGrpSpPr/>
-        <p:nvPr/>
-      </p:nvGrpSpPr>
-      <p:grpSpPr>
-        <a:xfrm>
-          <a:off x="0" y="0"/>
-          <a:ext cx="0" cy="0"/>
-          <a:chOff x="0" y="0"/>
-          <a:chExt cx="0" cy="0"/>
-        </a:xfrm>
-      </p:grpSpPr>
-      <p:sp>
-        <p:nvSpPr>
-          <p:cNvPr id="69" name="PlaceHolder 1"/>
-          <p:cNvSpPr>
-            <a:spLocks noGrp="1"/>
-          </p:cNvSpPr>
-          <p:nvPr>
-            <p:ph type="title"/>
-          </p:nvPr>
-        </p:nvSpPr>
-        <p:spPr>
-          <a:xfrm rot="21111000">
-            <a:off x="90000" y="41240"/>
-            <a:ext cx="9000000" cy="553998"/>
-          </a:xfrm>
-          <a:prstGeom prst="rect">
-            <a:avLst/>
-          </a:prstGeom>
-          <a:noFill/>
-          <a:ln w="0">
-            <a:noFill/>
-          </a:ln>
-        </p:spPr>
-        <p:txBody>
-          <a:bodyPr lIns="0" tIns="0" rIns="0" bIns="0" anchor="ctr">
-            <a:spAutoFit/>
-          </a:bodyPr>
-          <a:lstStyle/>
-          <a:p>
-            <a:pPr indent="0">
-              <a:buNone/>
-            </a:pPr>
-            <a:r>
-              <a:rPr lang="hu-HU" sz="2000" b="1" u="none" strike="noStrike" dirty="0">
-                <a:effectLst/>
-                <a:uFillTx/>
-                <a:latin typeface="Arial"/>
-              </a:rPr>
-              <a:t>3. Diákok problémái és </a:t>
-            </a:r>
-            <a:br>
-              <a:rPr sz="2000" dirty="0"/>
-            </a:br>
-            <a:r>
-              <a:rPr lang="hu-HU" sz="2000" b="1" u="none" strike="noStrike" dirty="0">
-                <a:effectLst/>
-                <a:uFillTx/>
-                <a:latin typeface="Arial"/>
-              </a:rPr>
-              <a:t>az ügyfélszolgálati jegyek kezelése</a:t>
-            </a:r>
-          </a:p>
-        </p:txBody>
-      </p:sp>
-      <p:pic>
-        <p:nvPicPr>
-          <p:cNvPr id="70" name="Kép 69"/>
-          <p:cNvPicPr/>
-          <p:nvPr/>
-        </p:nvPicPr>
-        <p:blipFill>
-          <a:blip r:embed="rId2"/>
-          <a:stretch/>
-        </p:blipFill>
-        <p:spPr>
-          <a:xfrm>
-            <a:off x="1066680" y="1080000"/>
-            <a:ext cx="7486560" cy="4140000"/>
-          </a:xfrm>
-          <a:prstGeom prst="rect">
-            <a:avLst/>
-          </a:prstGeom>
-          <a:noFill/>
-          <a:ln w="10800">
-            <a:noFill/>
-          </a:ln>
-        </p:spPr>
-      </p:pic>
-      <p:sp>
-        <p:nvSpPr>
-          <p:cNvPr id="3" name="PlaceHolder 2"/>
-          <p:cNvSpPr>
-            <a:spLocks noGrp="1"/>
-          </p:cNvSpPr>
-          <p:nvPr>
-            <p:ph type="sldNum" idx="6"/>
-          </p:nvPr>
-        </p:nvSpPr>
-        <p:spPr/>
-        <p:txBody>
-          <a:bodyPr/>
-          <a:lstStyle/>
-          <a:p>
-            <a:fld id="{FC168A9F-4D28-4469-B8C6-00F5EB7676E5}" type="slidenum">
-              <a:rPr/>
-              <a:t>15</a:t>
-            </a:fld>
-            <a:endParaRPr/>
-          </a:p>
-        </p:txBody>
-      </p:sp>
-    </p:spTree>
-  </p:cSld>
-  <p:clrMapOvr>
-    <a:masterClrMapping/>
-  </p:clrMapOvr>
-  <mc:AlternateContent xmlns:mc="http://schemas.openxmlformats.org/markup-compatibility/2006" xmlns:p14="http://schemas.microsoft.com/office/powerpoint/2010/main">
-    <mc:Choice Requires="p14">
-      <p:transition spd="slow" p14:dur="2000">
-        <p:fade/>
-      </p:transition>
-    </mc:Choice>
-    <mc:Fallback xmlns:p15="http://schemas.microsoft.com/office/powerpoint/2012/main" xmlns="">
-      <p:transition spd="slow">
-        <p:fade/>
-      </p:transition>
-    </mc:Fallback>
-  </mc:AlternateContent>
-</p:sld>
-</file>
-
-<file path=ppt/slides/slide16.xml><?xml version="1.0" encoding="utf-8"?>
-<p:sld xmlns:a="http://schemas.openxmlformats.org/drawingml/2006/main" xmlns:r="http://schemas.openxmlformats.org/officeDocument/2006/relationships" xmlns:p="http://schemas.openxmlformats.org/presentationml/2006/main">
-  <p:cSld>
-    <p:spTree>
-      <p:nvGrpSpPr>
-        <p:cNvPr id="1" name=""/>
-        <p:cNvGrpSpPr/>
-        <p:nvPr/>
-      </p:nvGrpSpPr>
-      <p:grpSpPr>
-        <a:xfrm>
-          <a:off x="0" y="0"/>
-          <a:ext cx="0" cy="0"/>
-          <a:chOff x="0" y="0"/>
-          <a:chExt cx="0" cy="0"/>
-        </a:xfrm>
-      </p:grpSpPr>
-      <p:sp>
-        <p:nvSpPr>
-          <p:cNvPr id="71" name="PlaceHolder 1"/>
-          <p:cNvSpPr>
-            <a:spLocks noGrp="1"/>
-          </p:cNvSpPr>
-          <p:nvPr>
-            <p:ph type="title"/>
-          </p:nvPr>
-        </p:nvSpPr>
-        <p:spPr>
-          <a:xfrm rot="21111000">
-            <a:off x="54376" y="70856"/>
-            <a:ext cx="9000000" cy="553998"/>
-          </a:xfrm>
-          <a:prstGeom prst="rect">
-            <a:avLst/>
-          </a:prstGeom>
-          <a:noFill/>
-          <a:ln w="0">
-            <a:noFill/>
-          </a:ln>
-        </p:spPr>
-        <p:txBody>
-          <a:bodyPr lIns="0" tIns="0" rIns="0" bIns="0" anchor="ctr">
-            <a:spAutoFit/>
-          </a:bodyPr>
-          <a:lstStyle/>
-          <a:p>
-            <a:pPr indent="0">
-              <a:buNone/>
-            </a:pPr>
-            <a:r>
-              <a:rPr lang="hu-HU" sz="2000" b="1" u="none" strike="noStrike" dirty="0">
-                <a:effectLst/>
-                <a:uFillTx/>
-                <a:latin typeface="Arial"/>
-              </a:rPr>
-              <a:t>4. Kurzus vizsga eredményeinek tárolása </a:t>
-            </a:r>
-            <a:br>
-              <a:rPr lang="hu-HU" sz="2000" b="1" u="none" strike="noStrike" dirty="0">
-                <a:effectLst/>
-                <a:uFillTx/>
-                <a:latin typeface="Arial"/>
-              </a:rPr>
-            </a:br>
-            <a:r>
-              <a:rPr lang="hu-HU" sz="2000" b="1" u="none" strike="noStrike" dirty="0">
-                <a:effectLst/>
-                <a:uFillTx/>
-                <a:latin typeface="Arial"/>
-              </a:rPr>
-              <a:t>és pontszámok kezelése</a:t>
-            </a:r>
-          </a:p>
-        </p:txBody>
-      </p:sp>
-      <p:pic>
-        <p:nvPicPr>
-          <p:cNvPr id="72" name="Kép 71"/>
-          <p:cNvPicPr/>
-          <p:nvPr/>
-        </p:nvPicPr>
-        <p:blipFill>
-          <a:blip r:embed="rId2"/>
-          <a:stretch/>
-        </p:blipFill>
-        <p:spPr>
-          <a:xfrm>
-            <a:off x="890280" y="1260000"/>
-            <a:ext cx="7749720" cy="3633480"/>
-          </a:xfrm>
-          <a:prstGeom prst="rect">
-            <a:avLst/>
-          </a:prstGeom>
-          <a:noFill/>
-          <a:ln w="10800">
-            <a:noFill/>
-          </a:ln>
-        </p:spPr>
-      </p:pic>
-      <p:sp>
-        <p:nvSpPr>
-          <p:cNvPr id="3" name="PlaceHolder 2"/>
-          <p:cNvSpPr>
-            <a:spLocks noGrp="1"/>
-          </p:cNvSpPr>
-          <p:nvPr>
-            <p:ph type="sldNum" idx="9"/>
-          </p:nvPr>
-        </p:nvSpPr>
-        <p:spPr/>
-        <p:txBody>
-          <a:bodyPr/>
-          <a:lstStyle/>
-          <a:p>
-            <a:fld id="{BA14B272-F95C-4474-A32C-D4ED1D04CA22}" type="slidenum">
-              <a:rPr/>
-              <a:t>16</a:t>
-            </a:fld>
-            <a:endParaRPr/>
-          </a:p>
-        </p:txBody>
-      </p:sp>
-    </p:spTree>
-  </p:cSld>
-  <p:clrMapOvr>
-    <a:masterClrMapping/>
-  </p:clrMapOvr>
-  <mc:AlternateContent xmlns:mc="http://schemas.openxmlformats.org/markup-compatibility/2006" xmlns:p14="http://schemas.microsoft.com/office/powerpoint/2010/main">
-    <mc:Choice Requires="p14">
-      <p:transition spd="slow" p14:dur="2000">
-        <p:fade/>
-      </p:transition>
-    </mc:Choice>
-    <mc:Fallback xmlns:p15="http://schemas.microsoft.com/office/powerpoint/2012/main" xmlns="">
-      <p:transition spd="slow">
-        <p:fade/>
-      </p:transition>
-    </mc:Fallback>
-  </mc:AlternateContent>
-</p:sld>
-</file>
-
-<file path=ppt/slides/slide17.xml><?xml version="1.0" encoding="utf-8"?>
+<file path=ppt/slides/slide13.xml><?xml version="1.0" encoding="utf-8"?>
 <p:sld xmlns:a="http://schemas.openxmlformats.org/drawingml/2006/main" xmlns:r="http://schemas.openxmlformats.org/officeDocument/2006/relationships" xmlns:p="http://schemas.openxmlformats.org/presentationml/2006/main">
   <p:cSld>
     <p:spTree>
@@ -7647,7 +6904,7 @@
                 <a:uFillTx/>
                 <a:latin typeface="Arial"/>
               </a:rPr>
-              <a:t>5. Ügyfélszolgálati jegy</a:t>
+              <a:t>2. Ügyfélszolgálati jegy</a:t>
             </a:r>
           </a:p>
         </p:txBody>
@@ -7675,7 +6932,7 @@
           <a:p>
             <a:fld id="{BA14B272-F95C-4474-A32C-D4ED1D04CA22}" type="slidenum">
               <a:rPr/>
-              <a:t>17</a:t>
+              <a:t>13</a:t>
             </a:fld>
             <a:endParaRPr/>
           </a:p>
@@ -7742,7 +6999,7 @@
 </p:sld>
 </file>
 
-<file path=ppt/slides/slide18.xml><?xml version="1.0" encoding="utf-8"?>
+<file path=ppt/slides/slide14.xml><?xml version="1.0" encoding="utf-8"?>
 <p:sld xmlns:a="http://schemas.openxmlformats.org/drawingml/2006/main" xmlns:r="http://schemas.openxmlformats.org/officeDocument/2006/relationships" xmlns:p="http://schemas.openxmlformats.org/presentationml/2006/main">
   <p:cSld>
     <p:spTree>
@@ -7809,7 +7066,7 @@
                 <a:uFillTx/>
                 <a:latin typeface="Arial"/>
               </a:rPr>
-              <a:t>5. Tanúsítvány kiadása</a:t>
+              <a:t>3. Tanúsítvány kiadása</a:t>
             </a:r>
           </a:p>
         </p:txBody>
@@ -7837,7 +7094,7 @@
           <a:p>
             <a:fld id="{BA14B272-F95C-4474-A32C-D4ED1D04CA22}" type="slidenum">
               <a:rPr/>
-              <a:t>18</a:t>
+              <a:t>14</a:t>
             </a:fld>
             <a:endParaRPr/>
           </a:p>
@@ -7904,7 +7161,343 @@
 </p:sld>
 </file>
 
-<file path=ppt/slides/slide19.xml><?xml version="1.0" encoding="utf-8"?>
+<file path=ppt/slides/slide15.xml><?xml version="1.0" encoding="utf-8"?>
+<p:sld xmlns:a="http://schemas.openxmlformats.org/drawingml/2006/main" xmlns:r="http://schemas.openxmlformats.org/officeDocument/2006/relationships" xmlns:p="http://schemas.openxmlformats.org/presentationml/2006/main">
+  <p:cSld>
+    <p:spTree>
+      <p:nvGrpSpPr>
+        <p:cNvPr id="1" name="">
+          <a:extLst>
+            <a:ext uri="{FF2B5EF4-FFF2-40B4-BE49-F238E27FC236}">
+              <a16:creationId xmlns:a16="http://schemas.microsoft.com/office/drawing/2014/main" id="{E58DDC3E-5215-A945-A8DE-632B93241148}"/>
+            </a:ext>
+          </a:extLst>
+        </p:cNvPr>
+        <p:cNvGrpSpPr/>
+        <p:nvPr/>
+      </p:nvGrpSpPr>
+      <p:grpSpPr>
+        <a:xfrm>
+          <a:off x="0" y="0"/>
+          <a:ext cx="0" cy="0"/>
+          <a:chOff x="0" y="0"/>
+          <a:chExt cx="0" cy="0"/>
+        </a:xfrm>
+      </p:grpSpPr>
+      <p:sp>
+        <p:nvSpPr>
+          <p:cNvPr id="71" name="PlaceHolder 1">
+            <a:extLst>
+              <a:ext uri="{FF2B5EF4-FFF2-40B4-BE49-F238E27FC236}">
+                <a16:creationId xmlns:a16="http://schemas.microsoft.com/office/drawing/2014/main" id="{59BCD2EA-D141-9CBE-0AA9-12C8EEE95F7A}"/>
+              </a:ext>
+            </a:extLst>
+          </p:cNvPr>
+          <p:cNvSpPr>
+            <a:spLocks noGrp="1"/>
+          </p:cNvSpPr>
+          <p:nvPr>
+            <p:ph type="title"/>
+          </p:nvPr>
+        </p:nvSpPr>
+        <p:spPr>
+          <a:xfrm rot="21111000">
+            <a:off x="54376" y="209355"/>
+            <a:ext cx="9000000" cy="276999"/>
+          </a:xfrm>
+          <a:prstGeom prst="rect">
+            <a:avLst/>
+          </a:prstGeom>
+          <a:noFill/>
+          <a:ln w="0">
+            <a:noFill/>
+          </a:ln>
+        </p:spPr>
+        <p:txBody>
+          <a:bodyPr lIns="0" tIns="0" rIns="0" bIns="0" anchor="ctr">
+            <a:spAutoFit/>
+          </a:bodyPr>
+          <a:lstStyle/>
+          <a:p>
+            <a:pPr indent="0">
+              <a:buNone/>
+            </a:pPr>
+            <a:r>
+              <a:rPr lang="hu-HU" sz="2000" b="1" dirty="0">
+                <a:latin typeface="Arial"/>
+              </a:rPr>
+              <a:t>4</a:t>
+            </a:r>
+            <a:r>
+              <a:rPr lang="hu-HU" sz="2000" b="1" u="none" strike="noStrike" dirty="0">
+                <a:effectLst/>
+                <a:uFillTx/>
+                <a:latin typeface="Arial"/>
+              </a:rPr>
+              <a:t>. Bejelentkezési Rendszer</a:t>
+            </a:r>
+          </a:p>
+        </p:txBody>
+      </p:sp>
+      <p:sp>
+        <p:nvSpPr>
+          <p:cNvPr id="3" name="PlaceHolder 2">
+            <a:extLst>
+              <a:ext uri="{FF2B5EF4-FFF2-40B4-BE49-F238E27FC236}">
+                <a16:creationId xmlns:a16="http://schemas.microsoft.com/office/drawing/2014/main" id="{A67A56E4-9FDD-8996-7E9D-3999469A63D5}"/>
+              </a:ext>
+            </a:extLst>
+          </p:cNvPr>
+          <p:cNvSpPr>
+            <a:spLocks noGrp="1"/>
+          </p:cNvSpPr>
+          <p:nvPr>
+            <p:ph type="sldNum" idx="9"/>
+          </p:nvPr>
+        </p:nvSpPr>
+        <p:spPr/>
+        <p:txBody>
+          <a:bodyPr/>
+          <a:lstStyle/>
+          <a:p>
+            <a:fld id="{BA14B272-F95C-4474-A32C-D4ED1D04CA22}" type="slidenum">
+              <a:rPr/>
+              <a:t>15</a:t>
+            </a:fld>
+            <a:endParaRPr/>
+          </a:p>
+        </p:txBody>
+      </p:sp>
+      <p:pic>
+        <p:nvPicPr>
+          <p:cNvPr id="5" name="Kép 4" descr="A képen szöveg, képernyőkép, diagram, tervezés látható&#10;&#10;Előfordulhat, hogy a mesterséges intelligencia által létrehozott tartalom helytelen.">
+            <a:extLst>
+              <a:ext uri="{FF2B5EF4-FFF2-40B4-BE49-F238E27FC236}">
+                <a16:creationId xmlns:a16="http://schemas.microsoft.com/office/drawing/2014/main" id="{C8CE0BF8-A381-02F6-7806-1869D5331AF8}"/>
+              </a:ext>
+            </a:extLst>
+          </p:cNvPr>
+          <p:cNvPicPr>
+            <a:picLocks noChangeAspect="1"/>
+          </p:cNvPicPr>
+          <p:nvPr/>
+        </p:nvPicPr>
+        <p:blipFill>
+          <a:blip r:embed="rId2">
+            <a:extLst>
+              <a:ext uri="{28A0092B-C50C-407E-A947-70E740481C1C}">
+                <a14:useLocalDpi xmlns:a14="http://schemas.microsoft.com/office/drawing/2010/main" val="0"/>
+              </a:ext>
+            </a:extLst>
+          </a:blip>
+          <a:stretch>
+            <a:fillRect/>
+          </a:stretch>
+        </p:blipFill>
+        <p:spPr>
+          <a:xfrm>
+            <a:off x="2442704" y="1122899"/>
+            <a:ext cx="4772025" cy="3924300"/>
+          </a:xfrm>
+          <a:prstGeom prst="rect">
+            <a:avLst/>
+          </a:prstGeom>
+        </p:spPr>
+      </p:pic>
+    </p:spTree>
+    <p:extLst>
+      <p:ext uri="{BB962C8B-B14F-4D97-AF65-F5344CB8AC3E}">
+        <p14:creationId xmlns:p14="http://schemas.microsoft.com/office/powerpoint/2010/main" val="1280603190"/>
+      </p:ext>
+    </p:extLst>
+  </p:cSld>
+  <p:clrMapOvr>
+    <a:masterClrMapping/>
+  </p:clrMapOvr>
+  <mc:AlternateContent xmlns:mc="http://schemas.openxmlformats.org/markup-compatibility/2006" xmlns:p14="http://schemas.microsoft.com/office/powerpoint/2010/main">
+    <mc:Choice Requires="p14">
+      <p:transition spd="slow" p14:dur="2000">
+        <p:fade/>
+      </p:transition>
+    </mc:Choice>
+    <mc:Fallback xmlns="">
+      <p:transition spd="slow">
+        <p:fade/>
+      </p:transition>
+    </mc:Fallback>
+  </mc:AlternateContent>
+</p:sld>
+</file>
+
+<file path=ppt/slides/slide16.xml><?xml version="1.0" encoding="utf-8"?>
+<p:sld xmlns:a="http://schemas.openxmlformats.org/drawingml/2006/main" xmlns:r="http://schemas.openxmlformats.org/officeDocument/2006/relationships" xmlns:p="http://schemas.openxmlformats.org/presentationml/2006/main">
+  <p:cSld>
+    <p:spTree>
+      <p:nvGrpSpPr>
+        <p:cNvPr id="1" name="">
+          <a:extLst>
+            <a:ext uri="{FF2B5EF4-FFF2-40B4-BE49-F238E27FC236}">
+              <a16:creationId xmlns:a16="http://schemas.microsoft.com/office/drawing/2014/main" id="{965F8C18-91AD-97D4-617A-B470D3298AA6}"/>
+            </a:ext>
+          </a:extLst>
+        </p:cNvPr>
+        <p:cNvGrpSpPr/>
+        <p:nvPr/>
+      </p:nvGrpSpPr>
+      <p:grpSpPr>
+        <a:xfrm>
+          <a:off x="0" y="0"/>
+          <a:ext cx="0" cy="0"/>
+          <a:chOff x="0" y="0"/>
+          <a:chExt cx="0" cy="0"/>
+        </a:xfrm>
+      </p:grpSpPr>
+      <p:sp>
+        <p:nvSpPr>
+          <p:cNvPr id="71" name="PlaceHolder 1">
+            <a:extLst>
+              <a:ext uri="{FF2B5EF4-FFF2-40B4-BE49-F238E27FC236}">
+                <a16:creationId xmlns:a16="http://schemas.microsoft.com/office/drawing/2014/main" id="{88F72BCB-4803-0BE9-3BEE-00E5258D4E0A}"/>
+              </a:ext>
+            </a:extLst>
+          </p:cNvPr>
+          <p:cNvSpPr>
+            <a:spLocks noGrp="1"/>
+          </p:cNvSpPr>
+          <p:nvPr>
+            <p:ph type="title"/>
+          </p:nvPr>
+        </p:nvSpPr>
+        <p:spPr>
+          <a:xfrm rot="21111000">
+            <a:off x="54376" y="209355"/>
+            <a:ext cx="9000000" cy="276999"/>
+          </a:xfrm>
+          <a:prstGeom prst="rect">
+            <a:avLst/>
+          </a:prstGeom>
+          <a:noFill/>
+          <a:ln w="0">
+            <a:noFill/>
+          </a:ln>
+        </p:spPr>
+        <p:txBody>
+          <a:bodyPr lIns="0" tIns="0" rIns="0" bIns="0" anchor="ctr">
+            <a:spAutoFit/>
+          </a:bodyPr>
+          <a:lstStyle/>
+          <a:p>
+            <a:pPr indent="0">
+              <a:buNone/>
+            </a:pPr>
+            <a:r>
+              <a:rPr lang="hu-HU" sz="2000" b="1" dirty="0">
+                <a:latin typeface="Arial"/>
+              </a:rPr>
+              <a:t>5</a:t>
+            </a:r>
+            <a:r>
+              <a:rPr lang="hu-HU" sz="2000" b="1" u="none" strike="noStrike" dirty="0">
+                <a:effectLst/>
+                <a:uFillTx/>
+                <a:latin typeface="Arial"/>
+              </a:rPr>
+              <a:t>. Az oldal működése</a:t>
+            </a:r>
+          </a:p>
+        </p:txBody>
+      </p:sp>
+      <p:sp>
+        <p:nvSpPr>
+          <p:cNvPr id="3" name="PlaceHolder 2">
+            <a:extLst>
+              <a:ext uri="{FF2B5EF4-FFF2-40B4-BE49-F238E27FC236}">
+                <a16:creationId xmlns:a16="http://schemas.microsoft.com/office/drawing/2014/main" id="{08FE032C-B5F7-1808-41A6-CEAE3772EC0D}"/>
+              </a:ext>
+            </a:extLst>
+          </p:cNvPr>
+          <p:cNvSpPr>
+            <a:spLocks noGrp="1"/>
+          </p:cNvSpPr>
+          <p:nvPr>
+            <p:ph type="sldNum" idx="9"/>
+          </p:nvPr>
+        </p:nvSpPr>
+        <p:spPr/>
+        <p:txBody>
+          <a:bodyPr/>
+          <a:lstStyle/>
+          <a:p>
+            <a:fld id="{BA14B272-F95C-4474-A32C-D4ED1D04CA22}" type="slidenum">
+              <a:rPr lang="hu-HU" smtClean="0"/>
+              <a:t>16</a:t>
+            </a:fld>
+            <a:endParaRPr lang="hu-HU" dirty="0"/>
+          </a:p>
+        </p:txBody>
+      </p:sp>
+      <p:pic>
+        <p:nvPicPr>
+          <p:cNvPr id="4" name="Kép 3" descr="A képen szöveg, diagram, képernyőkép, sor látható&#10;&#10;Előfordulhat, hogy a mesterséges intelligencia által létrehozott tartalom helytelen.">
+            <a:extLst>
+              <a:ext uri="{FF2B5EF4-FFF2-40B4-BE49-F238E27FC236}">
+                <a16:creationId xmlns:a16="http://schemas.microsoft.com/office/drawing/2014/main" id="{1C20452C-7DFD-66A4-B192-81BC9D5E6AEE}"/>
+              </a:ext>
+            </a:extLst>
+          </p:cNvPr>
+          <p:cNvPicPr>
+            <a:picLocks noChangeAspect="1"/>
+          </p:cNvPicPr>
+          <p:nvPr/>
+        </p:nvPicPr>
+        <p:blipFill>
+          <a:blip r:embed="rId2">
+            <a:extLst>
+              <a:ext uri="{28A0092B-C50C-407E-A947-70E740481C1C}">
+                <a14:useLocalDpi xmlns:a14="http://schemas.microsoft.com/office/drawing/2010/main" val="0"/>
+              </a:ext>
+            </a:extLst>
+          </a:blip>
+          <a:stretch>
+            <a:fillRect/>
+          </a:stretch>
+        </p:blipFill>
+        <p:spPr>
+          <a:xfrm>
+            <a:off x="2403134" y="982066"/>
+            <a:ext cx="4425595" cy="4203522"/>
+          </a:xfrm>
+          <a:prstGeom prst="rect">
+            <a:avLst/>
+          </a:prstGeom>
+        </p:spPr>
+      </p:pic>
+    </p:spTree>
+    <p:extLst>
+      <p:ext uri="{BB962C8B-B14F-4D97-AF65-F5344CB8AC3E}">
+        <p14:creationId xmlns:p14="http://schemas.microsoft.com/office/powerpoint/2010/main" val="86439596"/>
+      </p:ext>
+    </p:extLst>
+  </p:cSld>
+  <p:clrMapOvr>
+    <a:masterClrMapping/>
+  </p:clrMapOvr>
+  <mc:AlternateContent xmlns:mc="http://schemas.openxmlformats.org/markup-compatibility/2006" xmlns:p14="http://schemas.microsoft.com/office/powerpoint/2010/main">
+    <mc:Choice Requires="p14">
+      <p:transition spd="slow" p14:dur="2000">
+        <p:fade/>
+      </p:transition>
+    </mc:Choice>
+    <mc:Fallback xmlns="">
+      <p:transition spd="slow">
+        <p:fade/>
+      </p:transition>
+    </mc:Fallback>
+  </mc:AlternateContent>
+</p:sld>
+</file>
+
+<file path=ppt/slides/slide17.xml><?xml version="1.0" encoding="utf-8"?>
 <p:sld xmlns:a="http://schemas.openxmlformats.org/drawingml/2006/main" xmlns:r="http://schemas.openxmlformats.org/officeDocument/2006/relationships" xmlns:p="http://schemas.openxmlformats.org/presentationml/2006/main">
   <p:cSld>
     <p:spTree>
@@ -8125,7 +7718,7 @@
         </p:nvSpPr>
         <p:spPr>
           <a:xfrm>
-            <a:off x="504000" y="1515240"/>
+            <a:off x="100106" y="1496700"/>
             <a:ext cx="9072000" cy="3288600"/>
           </a:xfrm>
           <a:prstGeom prst="rect">
@@ -8142,7 +7735,7 @@
           </a:bodyPr>
           <a:lstStyle/>
           <a:p>
-            <a:pPr marL="432000" indent="0" algn="just">
+            <a:pPr marL="432000" indent="0" algn="ctr">
               <a:spcAft>
                 <a:spcPts val="856"/>
               </a:spcAft>
@@ -8163,7 +7756,7 @@
             </a:endParaRPr>
           </a:p>
           <a:p>
-            <a:pPr marL="432000" indent="-324000" algn="just">
+            <a:pPr marL="432000" indent="-324000" algn="ctr">
               <a:spcAft>
                 <a:spcPts val="856"/>
               </a:spcAft>
@@ -8213,7 +7806,7 @@
             </a:endParaRPr>
           </a:p>
           <a:p>
-            <a:pPr marL="432000" indent="-324000" algn="just">
+            <a:pPr marL="432000" indent="-324000" algn="ctr">
               <a:spcAft>
                 <a:spcPts val="856"/>
               </a:spcAft>
@@ -8234,7 +7827,7 @@
             </a:r>
           </a:p>
           <a:p>
-            <a:pPr marL="432000" indent="-324000" algn="just">
+            <a:pPr marL="432000" indent="-324000" algn="ctr">
               <a:spcAft>
                 <a:spcPts val="856"/>
               </a:spcAft>
@@ -8255,7 +7848,7 @@
             </a:r>
           </a:p>
           <a:p>
-            <a:pPr marL="432000" indent="-324000" algn="just">
+            <a:pPr marL="432000" indent="-324000" algn="ctr">
               <a:spcAft>
                 <a:spcPts val="856"/>
               </a:spcAft>
@@ -8921,7 +8514,15 @@
             </a:r>
             <a:r>
               <a:rPr lang="hu-HU" sz="2800" dirty="0"/>
-              <a:t> a tanúsítványt – plusz kaptak egy 10%-os kupont.</a:t>
+              <a:t> a tanúsítványt – plusz </a:t>
+            </a:r>
+            <a:r>
+              <a:rPr lang="en-US" sz="2800" dirty="0" err="1"/>
+              <a:t>kapott</a:t>
+            </a:r>
+            <a:r>
+              <a:rPr lang="hu-HU" sz="2800" dirty="0"/>
+              <a:t> egy 10%-os kupont.</a:t>
             </a:r>
           </a:p>
         </p:txBody>
@@ -8970,13 +8571,13 @@
   <p:clrMapOvr>
     <a:masterClrMapping/>
   </p:clrMapOvr>
-  <mc:AlternateContent xmlns:mc="http://schemas.openxmlformats.org/markup-compatibility/2006">
-    <mc:Choice xmlns:p14="http://schemas.microsoft.com/office/powerpoint/2010/main" Requires="p14">
+  <mc:AlternateContent xmlns:mc="http://schemas.openxmlformats.org/markup-compatibility/2006" xmlns:p14="http://schemas.microsoft.com/office/powerpoint/2010/main">
+    <mc:Choice Requires="p14">
       <p:transition spd="slow" p14:dur="2000">
         <p:fade/>
       </p:transition>
     </mc:Choice>
-    <mc:Fallback>
+    <mc:Fallback xmlns="">
       <p:transition spd="slow">
         <p:fade/>
       </p:transition>
@@ -9004,7 +8605,7 @@
       </p:grpSpPr>
       <p:sp>
         <p:nvSpPr>
-          <p:cNvPr id="55" name="PlaceHolder 1"/>
+          <p:cNvPr id="57" name="PlaceHolder 1"/>
           <p:cNvSpPr>
             <a:spLocks noGrp="1"/>
           </p:cNvSpPr>
@@ -9014,7 +8615,7 @@
         </p:nvSpPr>
         <p:spPr>
           <a:xfrm rot="21111000">
-            <a:off x="92160" y="295021"/>
+            <a:off x="90000" y="68941"/>
             <a:ext cx="9000000" cy="498598"/>
           </a:xfrm>
           <a:prstGeom prst="rect">
@@ -9047,7 +8648,7 @@
       </p:sp>
       <p:sp>
         <p:nvSpPr>
-          <p:cNvPr id="56" name="PlaceHolder 2"/>
+          <p:cNvPr id="58" name="PlaceHolder 2"/>
           <p:cNvSpPr>
             <a:spLocks noGrp="1"/>
           </p:cNvSpPr>
@@ -9057,8 +8658,8 @@
         </p:nvSpPr>
         <p:spPr>
           <a:xfrm>
-            <a:off x="503640" y="1785240"/>
-            <a:ext cx="8870040" cy="3288600"/>
+            <a:off x="504000" y="1515240"/>
+            <a:ext cx="9072000" cy="3288600"/>
           </a:xfrm>
           <a:prstGeom prst="rect">
             <a:avLst/>
@@ -9070,56 +8671,386 @@
         </p:spPr>
         <p:txBody>
           <a:bodyPr lIns="0" tIns="0" rIns="0" bIns="0" anchor="t">
-            <a:normAutofit lnSpcReduction="10000"/>
+            <a:noAutofit/>
           </a:bodyPr>
           <a:lstStyle/>
           <a:p>
-            <a:pPr marL="432000" indent="-324000" algn="just">
-              <a:spcAft>
-                <a:spcPts val="859"/>
-              </a:spcAft>
-              <a:buClr>
-                <a:srgbClr val="FFFFFF"/>
-              </a:buClr>
-              <a:buSzPct val="45000"/>
-              <a:buFont typeface="Wingdings" charset="2"/>
-              <a:buChar char=""/>
+            <a:pPr>
+              <a:buNone/>
             </a:pPr>
             <a:r>
-              <a:rPr lang="hu-HU" sz="2400" b="0" u="none" strike="noStrike" dirty="0">
+              <a:rPr lang="hu-HU" sz="2000" b="0" u="none" strike="noStrike" dirty="0">
+                <a:solidFill>
+                  <a:schemeClr val="tx1"/>
+                </a:solidFill>
                 <a:effectLst/>
                 <a:uFillTx/>
                 <a:latin typeface="Arial"/>
               </a:rPr>
-              <a:t>Főbb Táblák:</a:t>
-            </a:r>
-          </a:p>
-          <a:p>
-            <a:pPr marL="648000" lvl="2" indent="-216000">
-              <a:spcAft>
-                <a:spcPts val="638"/>
-              </a:spcAft>
-              <a:buClr>
-                <a:srgbClr val="FFFFFF"/>
-              </a:buClr>
-              <a:buSzPct val="45000"/>
-              <a:buFont typeface="Wingdings" charset="2"/>
-              <a:buChar char=""/>
+              <a:t>Főbb táblák:</a:t>
+            </a:r>
+            <a:br>
+              <a:rPr lang="hu-HU" sz="2000" b="0" u="none" strike="noStrike" dirty="0">
+                <a:solidFill>
+                  <a:schemeClr val="tx1"/>
+                </a:solidFill>
+                <a:effectLst/>
+                <a:uFillTx/>
+                <a:latin typeface="Arial"/>
+              </a:rPr>
+            </a:br>
+            <a:endParaRPr lang="hu-HU" sz="2000" b="0" u="none" strike="noStrike" dirty="0">
+              <a:solidFill>
+                <a:schemeClr val="tx1"/>
+              </a:solidFill>
+              <a:effectLst/>
+              <a:uFillTx/>
+              <a:latin typeface="Arial"/>
+            </a:endParaRPr>
+          </a:p>
+          <a:p>
+            <a:pPr>
+              <a:buNone/>
             </a:pPr>
             <a:r>
-              <a:rPr lang="hu-HU" sz="1800" b="0" u="none" strike="noStrike" dirty="0">
-                <a:solidFill>
-                  <a:schemeClr val="tx1"/>
-                </a:solidFill>
-                <a:effectLst/>
-                <a:uFillTx/>
-                <a:latin typeface="Arial"/>
-              </a:rPr>
-              <a:t>Diákok</a:t>
-            </a:r>
-          </a:p>
-          <a:p>
-            <a:pPr marL="864000" lvl="3" indent="-216000">
+              <a:rPr lang="hu-HU" sz="2000" dirty="0"/>
+              <a:t>	</a:t>
+            </a:r>
+            <a:r>
+              <a:rPr lang="hu-HU" sz="2000" dirty="0" err="1"/>
+              <a:t>Student</a:t>
+            </a:r>
+            <a:r>
+              <a:rPr lang="hu-HU" sz="2000" dirty="0"/>
+              <a:t> (</a:t>
+            </a:r>
+            <a:r>
+              <a:rPr lang="hu-HU" sz="2000" dirty="0" err="1"/>
+              <a:t>id</a:t>
+            </a:r>
+            <a:r>
+              <a:rPr lang="hu-HU" sz="2000" dirty="0"/>
+              <a:t>, </a:t>
+            </a:r>
+            <a:r>
+              <a:rPr lang="hu-HU" sz="2000" dirty="0" err="1"/>
+              <a:t>name</a:t>
+            </a:r>
+            <a:r>
+              <a:rPr lang="hu-HU" sz="2000" dirty="0"/>
+              <a:t>, email, </a:t>
+            </a:r>
+            <a:r>
+              <a:rPr lang="hu-HU" sz="2000" dirty="0" err="1"/>
+              <a:t>registration_date</a:t>
+            </a:r>
+            <a:r>
+              <a:rPr lang="hu-HU" sz="2000" dirty="0"/>
+              <a:t>)</a:t>
+            </a:r>
+          </a:p>
+          <a:p>
+            <a:pPr>
+              <a:buNone/>
+            </a:pPr>
+            <a:r>
+              <a:rPr lang="hu-HU" sz="2000" dirty="0"/>
+              <a:t>	</a:t>
+            </a:r>
+            <a:r>
+              <a:rPr lang="hu-HU" sz="2000" dirty="0" err="1"/>
+              <a:t>Instructor</a:t>
+            </a:r>
+            <a:r>
+              <a:rPr lang="hu-HU" sz="2000" dirty="0"/>
+              <a:t> (</a:t>
+            </a:r>
+            <a:r>
+              <a:rPr lang="hu-HU" sz="2000" dirty="0" err="1"/>
+              <a:t>id</a:t>
+            </a:r>
+            <a:r>
+              <a:rPr lang="hu-HU" sz="2000" dirty="0"/>
+              <a:t>, </a:t>
+            </a:r>
+            <a:r>
+              <a:rPr lang="hu-HU" sz="2000" dirty="0" err="1"/>
+              <a:t>name</a:t>
+            </a:r>
+            <a:r>
+              <a:rPr lang="hu-HU" sz="2000" dirty="0"/>
+              <a:t>, email, </a:t>
+            </a:r>
+            <a:r>
+              <a:rPr lang="hu-HU" sz="2000" dirty="0" err="1"/>
+              <a:t>specialty</a:t>
+            </a:r>
+            <a:r>
+              <a:rPr lang="hu-HU" sz="2000" dirty="0"/>
+              <a:t>)</a:t>
+            </a:r>
+          </a:p>
+          <a:p>
+            <a:pPr>
+              <a:buNone/>
+            </a:pPr>
+            <a:r>
+              <a:rPr lang="hu-HU" sz="2000" dirty="0"/>
+              <a:t>	</a:t>
+            </a:r>
+            <a:r>
+              <a:rPr lang="hu-HU" sz="2000" dirty="0" err="1"/>
+              <a:t>Course</a:t>
+            </a:r>
+            <a:r>
+              <a:rPr lang="hu-HU" sz="2000" dirty="0"/>
+              <a:t> (</a:t>
+            </a:r>
+            <a:r>
+              <a:rPr lang="hu-HU" sz="2000" dirty="0" err="1"/>
+              <a:t>id</a:t>
+            </a:r>
+            <a:r>
+              <a:rPr lang="hu-HU" sz="2000" dirty="0"/>
+              <a:t>, </a:t>
+            </a:r>
+            <a:r>
+              <a:rPr lang="hu-HU" sz="2000" dirty="0" err="1"/>
+              <a:t>instructor_id</a:t>
+            </a:r>
+            <a:r>
+              <a:rPr lang="hu-HU" sz="2000" dirty="0"/>
+              <a:t>, </a:t>
+            </a:r>
+            <a:r>
+              <a:rPr lang="hu-HU" sz="2000" dirty="0" err="1"/>
+              <a:t>start_date</a:t>
+            </a:r>
+            <a:r>
+              <a:rPr lang="hu-HU" sz="2000" dirty="0"/>
+              <a:t>, </a:t>
+            </a:r>
+            <a:r>
+              <a:rPr lang="hu-HU" sz="2000" dirty="0" err="1"/>
+              <a:t>price</a:t>
+            </a:r>
+            <a:r>
+              <a:rPr lang="hu-HU" sz="2000" dirty="0"/>
+              <a:t>)</a:t>
+            </a:r>
+          </a:p>
+          <a:p>
+            <a:pPr>
+              <a:buNone/>
+            </a:pPr>
+            <a:r>
+              <a:rPr lang="hu-HU" sz="2000" dirty="0"/>
+              <a:t>	</a:t>
+            </a:r>
+            <a:r>
+              <a:rPr lang="hu-HU" sz="2000" dirty="0" err="1"/>
+              <a:t>Enrollment</a:t>
+            </a:r>
+            <a:r>
+              <a:rPr lang="hu-HU" sz="2000" dirty="0"/>
+              <a:t> (</a:t>
+            </a:r>
+            <a:r>
+              <a:rPr lang="hu-HU" sz="2000" dirty="0" err="1"/>
+              <a:t>student_id</a:t>
+            </a:r>
+            <a:r>
+              <a:rPr lang="hu-HU" sz="2000" dirty="0"/>
+              <a:t>, </a:t>
+            </a:r>
+            <a:r>
+              <a:rPr lang="hu-HU" sz="2000" dirty="0" err="1"/>
+              <a:t>course_id</a:t>
+            </a:r>
+            <a:r>
+              <a:rPr lang="hu-HU" sz="2000" dirty="0"/>
+              <a:t>, </a:t>
+            </a:r>
+            <a:r>
+              <a:rPr lang="hu-HU" sz="2000" dirty="0" err="1"/>
+              <a:t>enrollment_date</a:t>
+            </a:r>
+            <a:r>
+              <a:rPr lang="hu-HU" sz="2000" dirty="0"/>
+              <a:t>)</a:t>
+            </a:r>
+          </a:p>
+          <a:p>
+            <a:pPr>
+              <a:buNone/>
+            </a:pPr>
+            <a:r>
+              <a:rPr lang="hu-HU" sz="2000" dirty="0"/>
+              <a:t>	</a:t>
+            </a:r>
+            <a:r>
+              <a:rPr lang="hu-HU" sz="2000" dirty="0" err="1"/>
+              <a:t>Certificate</a:t>
+            </a:r>
+            <a:r>
+              <a:rPr lang="hu-HU" sz="2000" dirty="0"/>
+              <a:t> (</a:t>
+            </a:r>
+            <a:r>
+              <a:rPr lang="hu-HU" sz="2000" dirty="0" err="1"/>
+              <a:t>id</a:t>
+            </a:r>
+            <a:r>
+              <a:rPr lang="hu-HU" sz="2000" dirty="0"/>
+              <a:t>, </a:t>
+            </a:r>
+            <a:r>
+              <a:rPr lang="hu-HU" sz="2000" dirty="0" err="1"/>
+              <a:t>student_id</a:t>
+            </a:r>
+            <a:r>
+              <a:rPr lang="hu-HU" sz="2000" dirty="0"/>
+              <a:t>, </a:t>
+            </a:r>
+            <a:r>
+              <a:rPr lang="hu-HU" sz="2000" dirty="0" err="1"/>
+              <a:t>course_id</a:t>
+            </a:r>
+            <a:r>
+              <a:rPr lang="hu-HU" sz="2000" dirty="0"/>
+              <a:t>, </a:t>
+            </a:r>
+            <a:r>
+              <a:rPr lang="hu-HU" sz="2000" dirty="0" err="1"/>
+              <a:t>date_issued</a:t>
+            </a:r>
+            <a:r>
+              <a:rPr lang="hu-HU" sz="2000" dirty="0"/>
+              <a:t>)</a:t>
+            </a:r>
+          </a:p>
+          <a:p>
+            <a:pPr>
+              <a:buNone/>
+            </a:pPr>
+            <a:endParaRPr lang="hu-HU" sz="2000" dirty="0"/>
+          </a:p>
+          <a:p>
+            <a:pPr>
+              <a:buNone/>
+            </a:pPr>
+            <a:r>
+              <a:rPr lang="hu-HU" sz="2000" dirty="0"/>
+              <a:t>Kapcsolatok:</a:t>
+            </a:r>
+          </a:p>
+          <a:p>
+            <a:pPr>
+              <a:buNone/>
+            </a:pPr>
+            <a:r>
+              <a:rPr lang="hu-HU" sz="2000" dirty="0"/>
+              <a:t>	</a:t>
+            </a:r>
+            <a:r>
+              <a:rPr lang="hu-HU" sz="2000" dirty="0" err="1"/>
+              <a:t>Student</a:t>
+            </a:r>
+            <a:r>
+              <a:rPr lang="hu-HU" sz="2000" dirty="0"/>
+              <a:t> → </a:t>
+            </a:r>
+            <a:r>
+              <a:rPr lang="hu-HU" sz="2000" dirty="0" err="1"/>
+              <a:t>Enrollment</a:t>
+            </a:r>
+            <a:r>
+              <a:rPr lang="hu-HU" sz="2000" dirty="0"/>
+              <a:t> (1:N)</a:t>
+            </a:r>
+          </a:p>
+          <a:p>
+            <a:pPr>
+              <a:buNone/>
+            </a:pPr>
+            <a:r>
+              <a:rPr lang="hu-HU" sz="2000" dirty="0"/>
+              <a:t>	</a:t>
+            </a:r>
+            <a:r>
+              <a:rPr lang="hu-HU" sz="2000" dirty="0" err="1"/>
+              <a:t>Instructor</a:t>
+            </a:r>
+            <a:r>
+              <a:rPr lang="hu-HU" sz="2000" dirty="0"/>
+              <a:t> → </a:t>
+            </a:r>
+            <a:r>
+              <a:rPr lang="hu-HU" sz="2000" dirty="0" err="1"/>
+              <a:t>Course</a:t>
+            </a:r>
+            <a:r>
+              <a:rPr lang="hu-HU" sz="2000" dirty="0"/>
+              <a:t> (1:N)</a:t>
+            </a:r>
+          </a:p>
+          <a:p>
+            <a:pPr>
+              <a:buNone/>
+            </a:pPr>
+            <a:r>
+              <a:rPr lang="hu-HU" sz="2000" dirty="0"/>
+              <a:t>	</a:t>
+            </a:r>
+            <a:r>
+              <a:rPr lang="hu-HU" sz="2000" dirty="0" err="1"/>
+              <a:t>Course</a:t>
+            </a:r>
+            <a:r>
+              <a:rPr lang="hu-HU" sz="2000" dirty="0"/>
+              <a:t> → </a:t>
+            </a:r>
+            <a:r>
+              <a:rPr lang="hu-HU" sz="2000" dirty="0" err="1"/>
+              <a:t>Enrollment</a:t>
+            </a:r>
+            <a:r>
+              <a:rPr lang="hu-HU" sz="2000" dirty="0"/>
+              <a:t> (1:N)</a:t>
+            </a:r>
+          </a:p>
+          <a:p>
+            <a:r>
+              <a:rPr lang="hu-HU" sz="2000" dirty="0"/>
+              <a:t>	</a:t>
+            </a:r>
+            <a:r>
+              <a:rPr lang="hu-HU" sz="2000" dirty="0" err="1"/>
+              <a:t>Student</a:t>
+            </a:r>
+            <a:r>
+              <a:rPr lang="hu-HU" sz="2000" dirty="0"/>
+              <a:t> + </a:t>
+            </a:r>
+            <a:r>
+              <a:rPr lang="hu-HU" sz="2000" dirty="0" err="1"/>
+              <a:t>Course</a:t>
+            </a:r>
+            <a:r>
+              <a:rPr lang="hu-HU" sz="2000" dirty="0"/>
+              <a:t> → </a:t>
+            </a:r>
+            <a:r>
+              <a:rPr lang="hu-HU" sz="2000" dirty="0" err="1"/>
+              <a:t>Certificate</a:t>
+            </a:r>
+            <a:r>
+              <a:rPr lang="hu-HU" sz="2000" dirty="0"/>
+              <a:t> (1:1)</a:t>
+            </a:r>
+          </a:p>
+          <a:p>
+            <a:pPr marL="864000" lvl="3" indent="-216000" algn="just">
               <a:spcAft>
                 <a:spcPts val="425"/>
               </a:spcAft>
@@ -9130,18 +9061,7 @@
               <a:buFont typeface="Wingdings" charset="2"/>
               <a:buChar char=""/>
             </a:pPr>
-            <a:r>
-              <a:rPr lang="hu-HU" sz="1500" b="0" u="none" strike="noStrike" dirty="0" err="1">
-                <a:solidFill>
-                  <a:schemeClr val="tx1"/>
-                </a:solidFill>
-                <a:effectLst/>
-                <a:uFillTx/>
-                <a:latin typeface="Arial"/>
-              </a:rPr>
-              <a:t>student_id</a:t>
-            </a:r>
-            <a:endParaRPr lang="hu-HU" sz="1500" b="0" u="none" strike="noStrike" dirty="0">
+            <a:endParaRPr lang="hu-HU" sz="2000" b="0" u="none" strike="noStrike" dirty="0">
               <a:solidFill>
                 <a:schemeClr val="tx1"/>
               </a:solidFill>
@@ -9150,254 +9070,6 @@
               <a:latin typeface="Arial"/>
             </a:endParaRPr>
           </a:p>
-          <a:p>
-            <a:pPr marL="864000" lvl="3" indent="-216000">
-              <a:spcAft>
-                <a:spcPts val="425"/>
-              </a:spcAft>
-              <a:buClr>
-                <a:srgbClr val="FFFFFF"/>
-              </a:buClr>
-              <a:buSzPct val="45000"/>
-              <a:buFont typeface="Wingdings" charset="2"/>
-              <a:buChar char=""/>
-            </a:pPr>
-            <a:r>
-              <a:rPr lang="hu-HU" sz="1500" b="0" u="none" strike="noStrike" dirty="0" err="1">
-                <a:solidFill>
-                  <a:schemeClr val="tx1"/>
-                </a:solidFill>
-                <a:effectLst/>
-                <a:uFillTx/>
-                <a:latin typeface="Arial"/>
-              </a:rPr>
-              <a:t>Name</a:t>
-            </a:r>
-            <a:endParaRPr lang="hu-HU" sz="1500" b="0" u="none" strike="noStrike" dirty="0">
-              <a:solidFill>
-                <a:schemeClr val="tx1"/>
-              </a:solidFill>
-              <a:effectLst/>
-              <a:uFillTx/>
-              <a:latin typeface="Arial"/>
-            </a:endParaRPr>
-          </a:p>
-          <a:p>
-            <a:pPr marL="864000" lvl="3" indent="-216000">
-              <a:spcAft>
-                <a:spcPts val="425"/>
-              </a:spcAft>
-              <a:buClr>
-                <a:srgbClr val="FFFFFF"/>
-              </a:buClr>
-              <a:buSzPct val="45000"/>
-              <a:buFont typeface="Wingdings" charset="2"/>
-              <a:buChar char=""/>
-            </a:pPr>
-            <a:r>
-              <a:rPr lang="hu-HU" sz="1500" b="0" u="none" strike="noStrike" dirty="0">
-                <a:solidFill>
-                  <a:schemeClr val="tx1"/>
-                </a:solidFill>
-                <a:effectLst/>
-                <a:uFillTx/>
-                <a:latin typeface="Arial"/>
-              </a:rPr>
-              <a:t>Email</a:t>
-            </a:r>
-          </a:p>
-          <a:p>
-            <a:pPr marL="864000" lvl="3" indent="-216000">
-              <a:spcAft>
-                <a:spcPts val="425"/>
-              </a:spcAft>
-              <a:buClr>
-                <a:srgbClr val="FFFFFF"/>
-              </a:buClr>
-              <a:buSzPct val="45000"/>
-              <a:buFont typeface="Wingdings" charset="2"/>
-              <a:buChar char=""/>
-            </a:pPr>
-            <a:r>
-              <a:rPr lang="hu-HU" sz="1500" b="0" u="none" strike="noStrike" dirty="0" err="1">
-                <a:solidFill>
-                  <a:schemeClr val="tx1"/>
-                </a:solidFill>
-                <a:effectLst/>
-                <a:uFillTx/>
-                <a:latin typeface="Arial"/>
-              </a:rPr>
-              <a:t>registration_date</a:t>
-            </a:r>
-            <a:endParaRPr lang="hu-HU" sz="1500" b="0" u="none" strike="noStrike" dirty="0">
-              <a:solidFill>
-                <a:schemeClr val="tx1"/>
-              </a:solidFill>
-              <a:effectLst/>
-              <a:uFillTx/>
-              <a:latin typeface="Arial"/>
-            </a:endParaRPr>
-          </a:p>
-          <a:p>
-            <a:pPr marL="648000" lvl="2" indent="-216000">
-              <a:spcAft>
-                <a:spcPts val="638"/>
-              </a:spcAft>
-              <a:buClr>
-                <a:srgbClr val="FFFFFF"/>
-              </a:buClr>
-              <a:buSzPct val="45000"/>
-              <a:buFont typeface="Wingdings" charset="2"/>
-              <a:buChar char=""/>
-            </a:pPr>
-            <a:r>
-              <a:rPr lang="hu-HU" sz="1800" b="0" u="none" strike="noStrike" dirty="0" err="1">
-                <a:solidFill>
-                  <a:schemeClr val="tx1"/>
-                </a:solidFill>
-                <a:effectLst/>
-                <a:uFillTx/>
-                <a:latin typeface="Arial"/>
-              </a:rPr>
-              <a:t>Kurzosok</a:t>
-            </a:r>
-            <a:endParaRPr lang="hu-HU" sz="1800" b="0" u="none" strike="noStrike" dirty="0">
-              <a:solidFill>
-                <a:schemeClr val="tx1"/>
-              </a:solidFill>
-              <a:effectLst/>
-              <a:uFillTx/>
-              <a:latin typeface="Arial"/>
-            </a:endParaRPr>
-          </a:p>
-          <a:p>
-            <a:pPr marL="864000" lvl="3" indent="-216000">
-              <a:spcAft>
-                <a:spcPts val="425"/>
-              </a:spcAft>
-              <a:buClr>
-                <a:srgbClr val="FFFFFF"/>
-              </a:buClr>
-              <a:buSzPct val="45000"/>
-              <a:buFont typeface="Wingdings" charset="2"/>
-              <a:buChar char=""/>
-            </a:pPr>
-            <a:r>
-              <a:rPr lang="hu-HU" sz="1500" b="0" u="none" strike="noStrike" dirty="0" err="1">
-                <a:solidFill>
-                  <a:schemeClr val="tx1"/>
-                </a:solidFill>
-                <a:effectLst/>
-                <a:uFillTx/>
-                <a:latin typeface="Arial"/>
-              </a:rPr>
-              <a:t>course_id</a:t>
-            </a:r>
-            <a:endParaRPr lang="hu-HU" sz="1500" b="0" u="none" strike="noStrike" dirty="0">
-              <a:solidFill>
-                <a:schemeClr val="tx1"/>
-              </a:solidFill>
-              <a:effectLst/>
-              <a:uFillTx/>
-              <a:latin typeface="Arial"/>
-            </a:endParaRPr>
-          </a:p>
-          <a:p>
-            <a:pPr marL="864000" lvl="3" indent="-216000">
-              <a:spcAft>
-                <a:spcPts val="425"/>
-              </a:spcAft>
-              <a:buClr>
-                <a:srgbClr val="FFFFFF"/>
-              </a:buClr>
-              <a:buSzPct val="45000"/>
-              <a:buFont typeface="Wingdings" charset="2"/>
-              <a:buChar char=""/>
-            </a:pPr>
-            <a:r>
-              <a:rPr lang="hu-HU" sz="1500" b="0" u="none" strike="noStrike" dirty="0" err="1">
-                <a:solidFill>
-                  <a:schemeClr val="tx1"/>
-                </a:solidFill>
-                <a:effectLst/>
-                <a:uFillTx/>
-                <a:latin typeface="Arial"/>
-              </a:rPr>
-              <a:t>instructor_id</a:t>
-            </a:r>
-            <a:endParaRPr lang="hu-HU" sz="1500" b="0" u="none" strike="noStrike" dirty="0">
-              <a:solidFill>
-                <a:schemeClr val="tx1"/>
-              </a:solidFill>
-              <a:effectLst/>
-              <a:uFillTx/>
-              <a:latin typeface="Arial"/>
-            </a:endParaRPr>
-          </a:p>
-          <a:p>
-            <a:pPr marL="864000" lvl="3" indent="-216000">
-              <a:spcAft>
-                <a:spcPts val="425"/>
-              </a:spcAft>
-              <a:buClr>
-                <a:srgbClr val="FFFFFF"/>
-              </a:buClr>
-              <a:buSzPct val="45000"/>
-              <a:buFont typeface="Wingdings" charset="2"/>
-              <a:buChar char=""/>
-            </a:pPr>
-            <a:r>
-              <a:rPr lang="hu-HU" sz="1500" b="0" u="none" strike="noStrike" dirty="0" err="1">
-                <a:solidFill>
-                  <a:schemeClr val="tx1"/>
-                </a:solidFill>
-                <a:effectLst/>
-                <a:uFillTx/>
-                <a:latin typeface="Arial"/>
-              </a:rPr>
-              <a:t>start_date</a:t>
-            </a:r>
-            <a:endParaRPr lang="hu-HU" sz="1500" b="0" u="none" strike="noStrike" dirty="0">
-              <a:solidFill>
-                <a:schemeClr val="tx1"/>
-              </a:solidFill>
-              <a:effectLst/>
-              <a:uFillTx/>
-              <a:latin typeface="Arial"/>
-            </a:endParaRPr>
-          </a:p>
-          <a:p>
-            <a:pPr marL="864000" lvl="3" indent="-216000">
-              <a:spcAft>
-                <a:spcPts val="425"/>
-              </a:spcAft>
-              <a:buClr>
-                <a:srgbClr val="FFFFFF"/>
-              </a:buClr>
-              <a:buSzPct val="45000"/>
-              <a:buFont typeface="Wingdings" charset="2"/>
-              <a:buChar char=""/>
-            </a:pPr>
-            <a:r>
-              <a:rPr lang="hu-HU" sz="1500" b="0" u="none" strike="noStrike" dirty="0" err="1">
-                <a:solidFill>
-                  <a:schemeClr val="tx1"/>
-                </a:solidFill>
-                <a:effectLst/>
-                <a:uFillTx/>
-                <a:latin typeface="Arial"/>
-              </a:rPr>
-              <a:t>price</a:t>
-            </a:r>
-            <a:endParaRPr lang="hu-HU" sz="1500" b="0" u="none" strike="noStrike" dirty="0">
-              <a:solidFill>
-                <a:schemeClr val="tx1"/>
-              </a:solidFill>
-              <a:effectLst/>
-              <a:uFillTx/>
-              <a:latin typeface="Arial"/>
-            </a:endParaRPr>
-          </a:p>
         </p:txBody>
       </p:sp>
       <p:sp>
@@ -9407,23 +9079,18 @@
             <a:spLocks noGrp="1"/>
           </p:cNvSpPr>
           <p:nvPr>
-            <p:ph type="sldNum" idx="9"/>
+            <p:ph type="sldNum" idx="6"/>
           </p:nvPr>
         </p:nvSpPr>
-        <p:spPr>
-          <a:xfrm>
-            <a:off x="7379640" y="4589640"/>
-            <a:ext cx="2520000" cy="400110"/>
-          </a:xfrm>
-        </p:spPr>
+        <p:spPr/>
         <p:txBody>
           <a:bodyPr/>
           <a:lstStyle/>
           <a:p>
-            <a:r>
-              <a:rPr lang="hu-HU" dirty="0"/>
+            <a:fld id="{6ABC195D-ECE3-402A-A3F4-AF85B4A88753}" type="slidenum">
+              <a:rPr/>
               <a:t>5</a:t>
-            </a:r>
+            </a:fld>
             <a:endParaRPr dirty="0"/>
           </a:p>
         </p:txBody>
@@ -9451,6 +9118,14 @@
 <file path=ppt/slides/slide6.xml><?xml version="1.0" encoding="utf-8"?>
 <p:sld xmlns:a="http://schemas.openxmlformats.org/drawingml/2006/main" xmlns:r="http://schemas.openxmlformats.org/officeDocument/2006/relationships" xmlns:p="http://schemas.openxmlformats.org/presentationml/2006/main">
   <p:cSld>
+    <p:bg>
+      <p:bgPr>
+        <a:solidFill>
+          <a:schemeClr val="bg1"/>
+        </a:solidFill>
+        <a:effectLst/>
+      </p:bgPr>
+    </p:bg>
     <p:spTree>
       <p:nvGrpSpPr>
         <p:cNvPr id="1" name=""/>
@@ -9467,7 +9142,73 @@
       </p:grpSpPr>
       <p:sp>
         <p:nvSpPr>
-          <p:cNvPr id="57" name="PlaceHolder 1"/>
+          <p:cNvPr id="65" name="Down Arrow 7">
+            <a:extLst>
+              <a:ext uri="{FF2B5EF4-FFF2-40B4-BE49-F238E27FC236}">
+                <a16:creationId xmlns:a16="http://schemas.microsoft.com/office/drawing/2014/main" id="{D4771268-CB57-404A-9271-370EB28F6090}"/>
+              </a:ext>
+              <a:ext uri="{C183D7F6-B498-43B3-948B-1728B52AA6E4}">
+                <adec:decorative xmlns:adec="http://schemas.microsoft.com/office/drawing/2017/decorative" val="1"/>
+              </a:ext>
+            </a:extLst>
+          </p:cNvPr>
+          <p:cNvSpPr>
+            <a:spLocks noGrp="1" noRot="1" noChangeAspect="1" noMove="1" noResize="1" noEditPoints="1" noAdjustHandles="1" noChangeArrowheads="1" noChangeShapeType="1" noTextEdit="1"/>
+          </p:cNvSpPr>
+          <p:nvPr>
+            <p:extLst>
+              <p:ext uri="{386F3935-93C4-4BCD-93E2-E3B085C9AB24}">
+                <p16:designElem xmlns:p16="http://schemas.microsoft.com/office/powerpoint/2015/main" val="1"/>
+              </p:ext>
+            </p:extLst>
+          </p:nvPr>
+        </p:nvSpPr>
+        <p:spPr>
+          <a:xfrm rot="16200000">
+            <a:off x="661493" y="1233170"/>
+            <a:ext cx="2756517" cy="2893139"/>
+          </a:xfrm>
+          <a:prstGeom prst="downArrow">
+            <a:avLst>
+              <a:gd name="adj1" fmla="val 100000"/>
+              <a:gd name="adj2" fmla="val 15788"/>
+            </a:avLst>
+          </a:prstGeom>
+          <a:solidFill>
+            <a:srgbClr val="404040"/>
+          </a:solidFill>
+          <a:ln w="53975">
+            <a:noFill/>
+          </a:ln>
+        </p:spPr>
+        <p:style>
+          <a:lnRef idx="2">
+            <a:schemeClr val="accent1">
+              <a:shade val="50000"/>
+            </a:schemeClr>
+          </a:lnRef>
+          <a:fillRef idx="1">
+            <a:schemeClr val="accent1"/>
+          </a:fillRef>
+          <a:effectRef idx="0">
+            <a:schemeClr val="accent1"/>
+          </a:effectRef>
+          <a:fontRef idx="minor">
+            <a:schemeClr val="lt1"/>
+          </a:fontRef>
+        </p:style>
+        <p:txBody>
+          <a:bodyPr rtlCol="0" anchor="ctr"/>
+          <a:lstStyle/>
+          <a:p>
+            <a:pPr algn="ctr"/>
+            <a:endParaRPr lang="en-US"/>
+          </a:p>
+        </p:txBody>
+      </p:sp>
+      <p:sp>
+        <p:nvSpPr>
+          <p:cNvPr id="59" name="PlaceHolder 1"/>
           <p:cNvSpPr>
             <a:spLocks noGrp="1"/>
           </p:cNvSpPr>
@@ -9476,484 +9217,110 @@
           </p:nvPr>
         </p:nvSpPr>
         <p:spPr>
-          <a:xfrm rot="21111000">
-            <a:off x="90000" y="68941"/>
-            <a:ext cx="9000000" cy="498598"/>
+          <a:xfrm>
+            <a:off x="850552" y="1626637"/>
+            <a:ext cx="2173635" cy="2106204"/>
           </a:xfrm>
           <a:prstGeom prst="rect">
             <a:avLst/>
           </a:prstGeom>
           <a:noFill/>
-          <a:ln w="0">
-            <a:noFill/>
-          </a:ln>
         </p:spPr>
         <p:txBody>
-          <a:bodyPr lIns="0" tIns="0" rIns="0" bIns="0" anchor="ctr">
-            <a:spAutoFit/>
+          <a:bodyPr vert="horz" lIns="91440" tIns="45720" rIns="91440" bIns="45720" rtlCol="0" anchor="ctr">
+            <a:normAutofit/>
           </a:bodyPr>
           <a:lstStyle/>
           <a:p>
-            <a:pPr indent="0">
-              <a:buNone/>
-            </a:pPr>
-            <a:r>
-              <a:rPr lang="hu-HU" sz="3600" b="1" u="none" strike="noStrike" dirty="0">
-                <a:effectLst/>
-                <a:uFillTx/>
-                <a:latin typeface="Arial"/>
-              </a:rPr>
-              <a:t>Adatbázis Modell</a:t>
-            </a:r>
-          </a:p>
-        </p:txBody>
-      </p:sp>
-      <p:sp>
-        <p:nvSpPr>
-          <p:cNvPr id="58" name="PlaceHolder 2"/>
-          <p:cNvSpPr>
-            <a:spLocks noGrp="1"/>
-          </p:cNvSpPr>
-          <p:nvPr>
-            <p:ph/>
-          </p:nvPr>
-        </p:nvSpPr>
+            <a:pPr indent="0" algn="ctr"/>
+            <a:r>
+              <a:rPr lang="en-US" sz="1900" b="1" u="none" strike="noStrike" kern="1200">
+                <a:solidFill>
+                  <a:srgbClr val="FFFFFF"/>
+                </a:solidFill>
+                <a:effectLst/>
+                <a:uFillTx/>
+                <a:latin typeface="+mj-lt"/>
+                <a:ea typeface="+mj-ea"/>
+                <a:cs typeface="+mj-cs"/>
+              </a:rPr>
+              <a:t>1.Legnépszerűbb kurzusok listája</a:t>
+            </a:r>
+          </a:p>
+        </p:txBody>
+      </p:sp>
+      <p:pic>
+        <p:nvPicPr>
+          <p:cNvPr id="60" name="Kép 59" descr="A képen szöveg, képernyőkép, szoftver, Multimédiás szoftver látható&#10;&#10;Előfordulhat, hogy a mesterséges intelligencia által létrehozott tartalom helytelen."/>
+          <p:cNvPicPr/>
+          <p:nvPr/>
+        </p:nvPicPr>
+        <p:blipFill>
+          <a:blip r:embed="rId2"/>
+          <a:stretch/>
+        </p:blipFill>
         <p:spPr>
           <a:xfrm>
-            <a:off x="504000" y="1515240"/>
-            <a:ext cx="9072000" cy="3288600"/>
+            <a:off x="3949994" y="1068284"/>
+            <a:ext cx="5606438" cy="3532055"/>
           </a:xfrm>
           <a:prstGeom prst="rect">
             <a:avLst/>
           </a:prstGeom>
           <a:noFill/>
-          <a:ln w="0">
-            <a:noFill/>
-          </a:ln>
         </p:spPr>
-        <p:txBody>
-          <a:bodyPr lIns="0" tIns="0" rIns="0" bIns="0" anchor="t">
-            <a:noAutofit/>
-          </a:bodyPr>
-          <a:lstStyle/>
-          <a:p>
-            <a:pPr>
-              <a:buNone/>
-            </a:pPr>
-            <a:r>
-              <a:rPr lang="hu-HU" sz="2000" b="0" u="none" strike="noStrike" dirty="0">
-                <a:solidFill>
-                  <a:schemeClr val="tx1"/>
-                </a:solidFill>
-                <a:effectLst/>
-                <a:uFillTx/>
-                <a:latin typeface="Arial"/>
-              </a:rPr>
-              <a:t>Főbb táblák:</a:t>
-            </a:r>
-            <a:br>
-              <a:rPr lang="hu-HU" sz="2000" b="0" u="none" strike="noStrike" dirty="0">
-                <a:solidFill>
-                  <a:schemeClr val="tx1"/>
-                </a:solidFill>
-                <a:effectLst/>
-                <a:uFillTx/>
-                <a:latin typeface="Arial"/>
-              </a:rPr>
-            </a:br>
-            <a:endParaRPr lang="hu-HU" sz="2000" b="0" u="none" strike="noStrike" dirty="0">
-              <a:solidFill>
-                <a:schemeClr val="tx1"/>
-              </a:solidFill>
-              <a:effectLst/>
-              <a:uFillTx/>
-              <a:latin typeface="Arial"/>
-            </a:endParaRPr>
-          </a:p>
-          <a:p>
-            <a:pPr>
-              <a:buNone/>
-            </a:pPr>
-            <a:r>
-              <a:rPr lang="hu-HU" sz="2000" dirty="0"/>
-              <a:t>	</a:t>
-            </a:r>
-            <a:r>
-              <a:rPr lang="hu-HU" sz="2000" dirty="0" err="1"/>
-              <a:t>Student</a:t>
-            </a:r>
-            <a:r>
-              <a:rPr lang="hu-HU" sz="2000" dirty="0"/>
-              <a:t> (</a:t>
-            </a:r>
-            <a:r>
-              <a:rPr lang="hu-HU" sz="2000" dirty="0" err="1"/>
-              <a:t>id</a:t>
-            </a:r>
-            <a:r>
-              <a:rPr lang="hu-HU" sz="2000" dirty="0"/>
-              <a:t>, </a:t>
-            </a:r>
-            <a:r>
-              <a:rPr lang="hu-HU" sz="2000" dirty="0" err="1"/>
-              <a:t>name</a:t>
-            </a:r>
-            <a:r>
-              <a:rPr lang="hu-HU" sz="2000" dirty="0"/>
-              <a:t>, email, </a:t>
-            </a:r>
-            <a:r>
-              <a:rPr lang="hu-HU" sz="2000" dirty="0" err="1"/>
-              <a:t>registration_date</a:t>
-            </a:r>
-            <a:r>
-              <a:rPr lang="hu-HU" sz="2000" dirty="0"/>
-              <a:t>)</a:t>
-            </a:r>
-          </a:p>
-          <a:p>
-            <a:pPr>
-              <a:buNone/>
-            </a:pPr>
-            <a:r>
-              <a:rPr lang="hu-HU" sz="2000" dirty="0"/>
-              <a:t>	</a:t>
-            </a:r>
-            <a:r>
-              <a:rPr lang="hu-HU" sz="2000" dirty="0" err="1"/>
-              <a:t>Instructor</a:t>
-            </a:r>
-            <a:r>
-              <a:rPr lang="hu-HU" sz="2000" dirty="0"/>
-              <a:t> (</a:t>
-            </a:r>
-            <a:r>
-              <a:rPr lang="hu-HU" sz="2000" dirty="0" err="1"/>
-              <a:t>id</a:t>
-            </a:r>
-            <a:r>
-              <a:rPr lang="hu-HU" sz="2000" dirty="0"/>
-              <a:t>, </a:t>
-            </a:r>
-            <a:r>
-              <a:rPr lang="hu-HU" sz="2000" dirty="0" err="1"/>
-              <a:t>name</a:t>
-            </a:r>
-            <a:r>
-              <a:rPr lang="hu-HU" sz="2000" dirty="0"/>
-              <a:t>, email, </a:t>
-            </a:r>
-            <a:r>
-              <a:rPr lang="hu-HU" sz="2000" dirty="0" err="1"/>
-              <a:t>specialty</a:t>
-            </a:r>
-            <a:r>
-              <a:rPr lang="hu-HU" sz="2000" dirty="0"/>
-              <a:t>)</a:t>
-            </a:r>
-          </a:p>
-          <a:p>
-            <a:pPr>
-              <a:buNone/>
-            </a:pPr>
-            <a:r>
-              <a:rPr lang="hu-HU" sz="2000" dirty="0"/>
-              <a:t>	</a:t>
-            </a:r>
-            <a:r>
-              <a:rPr lang="hu-HU" sz="2000" dirty="0" err="1"/>
-              <a:t>Course</a:t>
-            </a:r>
-            <a:r>
-              <a:rPr lang="hu-HU" sz="2000" dirty="0"/>
-              <a:t> (</a:t>
-            </a:r>
-            <a:r>
-              <a:rPr lang="hu-HU" sz="2000" dirty="0" err="1"/>
-              <a:t>id</a:t>
-            </a:r>
-            <a:r>
-              <a:rPr lang="hu-HU" sz="2000" dirty="0"/>
-              <a:t>, </a:t>
-            </a:r>
-            <a:r>
-              <a:rPr lang="hu-HU" sz="2000" dirty="0" err="1"/>
-              <a:t>instructor_id</a:t>
-            </a:r>
-            <a:r>
-              <a:rPr lang="hu-HU" sz="2000" dirty="0"/>
-              <a:t>, </a:t>
-            </a:r>
-            <a:r>
-              <a:rPr lang="hu-HU" sz="2000" dirty="0" err="1"/>
-              <a:t>start_date</a:t>
-            </a:r>
-            <a:r>
-              <a:rPr lang="hu-HU" sz="2000" dirty="0"/>
-              <a:t>, </a:t>
-            </a:r>
-            <a:r>
-              <a:rPr lang="hu-HU" sz="2000" dirty="0" err="1"/>
-              <a:t>price</a:t>
-            </a:r>
-            <a:r>
-              <a:rPr lang="hu-HU" sz="2000" dirty="0"/>
-              <a:t>)</a:t>
-            </a:r>
-          </a:p>
-          <a:p>
-            <a:pPr>
-              <a:buNone/>
-            </a:pPr>
-            <a:r>
-              <a:rPr lang="hu-HU" sz="2000" dirty="0"/>
-              <a:t>	</a:t>
-            </a:r>
-            <a:r>
-              <a:rPr lang="hu-HU" sz="2000" dirty="0" err="1"/>
-              <a:t>Enrollment</a:t>
-            </a:r>
-            <a:r>
-              <a:rPr lang="hu-HU" sz="2000" dirty="0"/>
-              <a:t> (</a:t>
-            </a:r>
-            <a:r>
-              <a:rPr lang="hu-HU" sz="2000" dirty="0" err="1"/>
-              <a:t>student_id</a:t>
-            </a:r>
-            <a:r>
-              <a:rPr lang="hu-HU" sz="2000" dirty="0"/>
-              <a:t>, </a:t>
-            </a:r>
-            <a:r>
-              <a:rPr lang="hu-HU" sz="2000" dirty="0" err="1"/>
-              <a:t>course_id</a:t>
-            </a:r>
-            <a:r>
-              <a:rPr lang="hu-HU" sz="2000" dirty="0"/>
-              <a:t>, </a:t>
-            </a:r>
-            <a:r>
-              <a:rPr lang="hu-HU" sz="2000" dirty="0" err="1"/>
-              <a:t>enrollment_date</a:t>
-            </a:r>
-            <a:r>
-              <a:rPr lang="hu-HU" sz="2000" dirty="0"/>
-              <a:t>)</a:t>
-            </a:r>
-          </a:p>
-          <a:p>
-            <a:pPr>
-              <a:buNone/>
-            </a:pPr>
-            <a:r>
-              <a:rPr lang="hu-HU" sz="2000" dirty="0"/>
-              <a:t>	</a:t>
-            </a:r>
-            <a:r>
-              <a:rPr lang="hu-HU" sz="2000" dirty="0" err="1"/>
-              <a:t>Certificate</a:t>
-            </a:r>
-            <a:r>
-              <a:rPr lang="hu-HU" sz="2000" dirty="0"/>
-              <a:t> (</a:t>
-            </a:r>
-            <a:r>
-              <a:rPr lang="hu-HU" sz="2000" dirty="0" err="1"/>
-              <a:t>id</a:t>
-            </a:r>
-            <a:r>
-              <a:rPr lang="hu-HU" sz="2000" dirty="0"/>
-              <a:t>, </a:t>
-            </a:r>
-            <a:r>
-              <a:rPr lang="hu-HU" sz="2000" dirty="0" err="1"/>
-              <a:t>student_id</a:t>
-            </a:r>
-            <a:r>
-              <a:rPr lang="hu-HU" sz="2000" dirty="0"/>
-              <a:t>, </a:t>
-            </a:r>
-            <a:r>
-              <a:rPr lang="hu-HU" sz="2000" dirty="0" err="1"/>
-              <a:t>course_id</a:t>
-            </a:r>
-            <a:r>
-              <a:rPr lang="hu-HU" sz="2000" dirty="0"/>
-              <a:t>, </a:t>
-            </a:r>
-            <a:r>
-              <a:rPr lang="hu-HU" sz="2000" dirty="0" err="1"/>
-              <a:t>date_issued</a:t>
-            </a:r>
-            <a:r>
-              <a:rPr lang="hu-HU" sz="2000" dirty="0"/>
-              <a:t>)</a:t>
-            </a:r>
-          </a:p>
-          <a:p>
-            <a:pPr>
-              <a:buNone/>
-            </a:pPr>
-            <a:endParaRPr lang="hu-HU" sz="2000" dirty="0"/>
-          </a:p>
-          <a:p>
-            <a:pPr>
-              <a:buNone/>
-            </a:pPr>
-            <a:r>
-              <a:rPr lang="hu-HU" sz="2000" dirty="0"/>
-              <a:t>Kapcsolatok:</a:t>
-            </a:r>
-          </a:p>
-          <a:p>
-            <a:pPr>
-              <a:buNone/>
-            </a:pPr>
-            <a:r>
-              <a:rPr lang="hu-HU" sz="2000" dirty="0"/>
-              <a:t>	</a:t>
-            </a:r>
-            <a:r>
-              <a:rPr lang="hu-HU" sz="2000" dirty="0" err="1"/>
-              <a:t>Student</a:t>
-            </a:r>
-            <a:r>
-              <a:rPr lang="hu-HU" sz="2000" dirty="0"/>
-              <a:t> → </a:t>
-            </a:r>
-            <a:r>
-              <a:rPr lang="hu-HU" sz="2000" dirty="0" err="1"/>
-              <a:t>Enrollment</a:t>
-            </a:r>
-            <a:r>
-              <a:rPr lang="hu-HU" sz="2000" dirty="0"/>
-              <a:t> (1:N)</a:t>
-            </a:r>
-          </a:p>
-          <a:p>
-            <a:pPr>
-              <a:buNone/>
-            </a:pPr>
-            <a:r>
-              <a:rPr lang="hu-HU" sz="2000" dirty="0"/>
-              <a:t>	</a:t>
-            </a:r>
-            <a:r>
-              <a:rPr lang="hu-HU" sz="2000" dirty="0" err="1"/>
-              <a:t>Instructor</a:t>
-            </a:r>
-            <a:r>
-              <a:rPr lang="hu-HU" sz="2000" dirty="0"/>
-              <a:t> → </a:t>
-            </a:r>
-            <a:r>
-              <a:rPr lang="hu-HU" sz="2000" dirty="0" err="1"/>
-              <a:t>Course</a:t>
-            </a:r>
-            <a:r>
-              <a:rPr lang="hu-HU" sz="2000" dirty="0"/>
-              <a:t> (1:N)</a:t>
-            </a:r>
-          </a:p>
-          <a:p>
-            <a:pPr>
-              <a:buNone/>
-            </a:pPr>
-            <a:r>
-              <a:rPr lang="hu-HU" sz="2000" dirty="0"/>
-              <a:t>	</a:t>
-            </a:r>
-            <a:r>
-              <a:rPr lang="hu-HU" sz="2000" dirty="0" err="1"/>
-              <a:t>Course</a:t>
-            </a:r>
-            <a:r>
-              <a:rPr lang="hu-HU" sz="2000" dirty="0"/>
-              <a:t> → </a:t>
-            </a:r>
-            <a:r>
-              <a:rPr lang="hu-HU" sz="2000" dirty="0" err="1"/>
-              <a:t>Enrollment</a:t>
-            </a:r>
-            <a:r>
-              <a:rPr lang="hu-HU" sz="2000" dirty="0"/>
-              <a:t> (1:N)</a:t>
-            </a:r>
-          </a:p>
-          <a:p>
-            <a:r>
-              <a:rPr lang="hu-HU" sz="2000" dirty="0"/>
-              <a:t>	</a:t>
-            </a:r>
-            <a:r>
-              <a:rPr lang="hu-HU" sz="2000" dirty="0" err="1"/>
-              <a:t>Student</a:t>
-            </a:r>
-            <a:r>
-              <a:rPr lang="hu-HU" sz="2000" dirty="0"/>
-              <a:t> + </a:t>
-            </a:r>
-            <a:r>
-              <a:rPr lang="hu-HU" sz="2000" dirty="0" err="1"/>
-              <a:t>Course</a:t>
-            </a:r>
-            <a:r>
-              <a:rPr lang="hu-HU" sz="2000" dirty="0"/>
-              <a:t> → </a:t>
-            </a:r>
-            <a:r>
-              <a:rPr lang="hu-HU" sz="2000" dirty="0" err="1"/>
-              <a:t>Certificate</a:t>
-            </a:r>
-            <a:r>
-              <a:rPr lang="hu-HU" sz="2000" dirty="0"/>
-              <a:t> (1:1)</a:t>
-            </a:r>
-          </a:p>
-          <a:p>
-            <a:pPr marL="864000" lvl="3" indent="-216000" algn="just">
-              <a:spcAft>
-                <a:spcPts val="425"/>
-              </a:spcAft>
-              <a:buClr>
-                <a:srgbClr val="FFFFFF"/>
-              </a:buClr>
-              <a:buSzPct val="45000"/>
-              <a:buFont typeface="Wingdings" charset="2"/>
-              <a:buChar char=""/>
-            </a:pPr>
-            <a:endParaRPr lang="hu-HU" sz="2000" b="0" u="none" strike="noStrike" dirty="0">
-              <a:solidFill>
-                <a:schemeClr val="tx1"/>
-              </a:solidFill>
-              <a:effectLst/>
-              <a:uFillTx/>
-              <a:latin typeface="Arial"/>
-            </a:endParaRPr>
-          </a:p>
-        </p:txBody>
-      </p:sp>
-      <p:sp>
-        <p:nvSpPr>
-          <p:cNvPr id="4" name="PlaceHolder 3"/>
+      </p:pic>
+      <p:sp>
+        <p:nvSpPr>
+          <p:cNvPr id="3" name="PlaceHolder 2"/>
           <p:cNvSpPr>
             <a:spLocks noGrp="1"/>
           </p:cNvSpPr>
           <p:nvPr>
-            <p:ph type="sldNum" idx="6"/>
+            <p:ph type="sldNum" idx="9"/>
           </p:nvPr>
         </p:nvSpPr>
-        <p:spPr/>
-        <p:txBody>
-          <a:bodyPr/>
+        <p:spPr>
+          <a:xfrm>
+            <a:off x="9343794" y="4998820"/>
+            <a:ext cx="425275" cy="301905"/>
+          </a:xfrm>
+        </p:spPr>
+        <p:txBody>
+          <a:bodyPr vert="horz" lIns="91440" tIns="45720" rIns="91440" bIns="45720" rtlCol="0" anchor="ctr">
+            <a:noAutofit/>
+          </a:bodyPr>
           <a:lstStyle/>
           <a:p>
-            <a:fld id="{6ABC195D-ECE3-402A-A3F4-AF85B4A88753}" type="slidenum">
-              <a:rPr/>
+            <a:pPr>
+              <a:spcAft>
+                <a:spcPts val="600"/>
+              </a:spcAft>
+            </a:pPr>
+            <a:fld id="{C933FE9D-0909-4844-89F0-81DC191A89A0}" type="slidenum">
+              <a:rPr lang="en-US">
+                <a:solidFill>
+                  <a:schemeClr val="bg1">
+                    <a:alpha val="80000"/>
+                  </a:schemeClr>
+                </a:solidFill>
+                <a:latin typeface="+mn-lt"/>
+              </a:rPr>
+              <a:pPr>
+                <a:spcAft>
+                  <a:spcPts val="600"/>
+                </a:spcAft>
+              </a:pPr>
               <a:t>6</a:t>
             </a:fld>
-            <a:endParaRPr dirty="0"/>
+            <a:endParaRPr lang="en-US" dirty="0">
+              <a:solidFill>
+                <a:schemeClr val="bg1">
+                  <a:alpha val="80000"/>
+                </a:schemeClr>
+              </a:solidFill>
+              <a:latin typeface="+mn-lt"/>
+            </a:endParaRPr>
           </a:p>
         </p:txBody>
       </p:sp>
@@ -10004,7 +9371,7 @@
       </p:grpSpPr>
       <p:sp>
         <p:nvSpPr>
-          <p:cNvPr id="65" name="Down Arrow 7">
+          <p:cNvPr id="67" name="Down Arrow 7">
             <a:extLst>
               <a:ext uri="{FF2B5EF4-FFF2-40B4-BE49-F238E27FC236}">
                 <a16:creationId xmlns:a16="http://schemas.microsoft.com/office/drawing/2014/main" id="{D4771268-CB57-404A-9271-370EB28F6090}"/>
@@ -10070,7 +9437,7 @@
       </p:sp>
       <p:sp>
         <p:nvSpPr>
-          <p:cNvPr id="59" name="PlaceHolder 1"/>
+          <p:cNvPr id="61" name="PlaceHolder 1"/>
           <p:cNvSpPr>
             <a:spLocks noGrp="1"/>
           </p:cNvSpPr>
@@ -10096,7 +9463,7 @@
           <a:p>
             <a:pPr indent="0" algn="ctr"/>
             <a:r>
-              <a:rPr lang="en-US" sz="1900" b="1" u="none" strike="noStrike" kern="1200">
+              <a:rPr lang="en-US" sz="2300" b="1" u="none" strike="noStrike" kern="1200">
                 <a:solidFill>
                   <a:srgbClr val="FFFFFF"/>
                 </a:solidFill>
@@ -10106,14 +9473,14 @@
                 <a:ea typeface="+mj-ea"/>
                 <a:cs typeface="+mj-cs"/>
               </a:rPr>
-              <a:t>1.Legnépszerűbb kurzusok listája</a:t>
+              <a:t>2. Diákok, akik 2024 előtt regisztráltak és legalább egy kurzusra beiratkoztak</a:t>
             </a:r>
           </a:p>
         </p:txBody>
       </p:sp>
       <p:pic>
         <p:nvPicPr>
-          <p:cNvPr id="60" name="Kép 59" descr="A képen szöveg, képernyőkép, szoftver, Multimédiás szoftver látható&#10;&#10;Előfordulhat, hogy a mesterséges intelligencia által létrehozott tartalom helytelen."/>
+          <p:cNvPr id="62" name="Kép 61"/>
           <p:cNvPicPr/>
           <p:nvPr/>
         </p:nvPicPr>
@@ -10123,8 +9490,8 @@
         </p:blipFill>
         <p:spPr>
           <a:xfrm>
-            <a:off x="3949994" y="1068284"/>
-            <a:ext cx="5606438" cy="3532055"/>
+            <a:off x="3949994" y="1236477"/>
+            <a:ext cx="5606438" cy="3195669"/>
           </a:xfrm>
           <a:prstGeom prst="rect">
             <a:avLst/>
@@ -10139,20 +9506,175 @@
             <a:spLocks noGrp="1"/>
           </p:cNvSpPr>
           <p:nvPr>
-            <p:ph type="sldNum" idx="9"/>
+            <p:ph type="sldNum" idx="6"/>
           </p:nvPr>
+        </p:nvSpPr>
+        <p:spPr>
+          <a:xfrm>
+            <a:off x="9123316" y="5255759"/>
+            <a:ext cx="425275" cy="301905"/>
+          </a:xfrm>
+        </p:spPr>
+        <p:txBody>
+          <a:bodyPr vert="horz" lIns="91440" tIns="45720" rIns="91440" bIns="45720" rtlCol="0" anchor="ctr">
+            <a:normAutofit/>
+          </a:bodyPr>
+          <a:lstStyle/>
+          <a:p>
+            <a:pPr>
+              <a:spcAft>
+                <a:spcPts val="600"/>
+              </a:spcAft>
+            </a:pPr>
+            <a:fld id="{E901FB2A-B232-49FB-AC10-873A8FA8E86B}" type="slidenum">
+              <a:rPr lang="en-US" sz="1200">
+                <a:solidFill>
+                  <a:schemeClr val="tx1">
+                    <a:alpha val="80000"/>
+                  </a:schemeClr>
+                </a:solidFill>
+                <a:latin typeface="+mn-lt"/>
+              </a:rPr>
+              <a:pPr>
+                <a:spcAft>
+                  <a:spcPts val="600"/>
+                </a:spcAft>
+              </a:pPr>
+              <a:t>7</a:t>
+            </a:fld>
+            <a:endParaRPr lang="en-US" sz="1200" dirty="0">
+              <a:solidFill>
+                <a:schemeClr val="tx1">
+                  <a:alpha val="80000"/>
+                </a:schemeClr>
+              </a:solidFill>
+              <a:latin typeface="+mn-lt"/>
+            </a:endParaRPr>
+          </a:p>
+        </p:txBody>
+      </p:sp>
+      <p:sp>
+        <p:nvSpPr>
+          <p:cNvPr id="2" name="PlaceHolder 2">
+            <a:extLst>
+              <a:ext uri="{FF2B5EF4-FFF2-40B4-BE49-F238E27FC236}">
+                <a16:creationId xmlns:a16="http://schemas.microsoft.com/office/drawing/2014/main" id="{C68702F4-E244-0979-171A-FEE457932DE5}"/>
+              </a:ext>
+            </a:extLst>
+          </p:cNvPr>
+          <p:cNvSpPr txBox="1">
+            <a:spLocks/>
+          </p:cNvSpPr>
+          <p:nvPr/>
         </p:nvSpPr>
         <p:spPr>
           <a:xfrm>
             <a:off x="9343794" y="4998820"/>
             <a:ext cx="425275" cy="301905"/>
           </a:xfrm>
+          <a:prstGeom prst="rect">
+            <a:avLst/>
+          </a:prstGeom>
         </p:spPr>
         <p:txBody>
           <a:bodyPr vert="horz" lIns="91440" tIns="45720" rIns="91440" bIns="45720" rtlCol="0" anchor="ctr">
             <a:noAutofit/>
           </a:bodyPr>
-          <a:lstStyle/>
+          <a:lstStyle>
+            <a:defPPr>
+              <a:defRPr lang="hu-HU"/>
+            </a:defPPr>
+            <a:lvl1pPr marL="0" algn="l" defTabSz="914400" rtl="0" eaLnBrk="1" latinLnBrk="0" hangingPunct="1">
+              <a:defRPr sz="1800" kern="1200">
+                <a:solidFill>
+                  <a:schemeClr val="tx1"/>
+                </a:solidFill>
+                <a:latin typeface="+mn-lt"/>
+                <a:ea typeface="+mn-ea"/>
+                <a:cs typeface="+mn-cs"/>
+              </a:defRPr>
+            </a:lvl1pPr>
+            <a:lvl2pPr marL="457200" algn="l" defTabSz="914400" rtl="0" eaLnBrk="1" latinLnBrk="0" hangingPunct="1">
+              <a:defRPr sz="1800" kern="1200">
+                <a:solidFill>
+                  <a:schemeClr val="tx1"/>
+                </a:solidFill>
+                <a:latin typeface="+mn-lt"/>
+                <a:ea typeface="+mn-ea"/>
+                <a:cs typeface="+mn-cs"/>
+              </a:defRPr>
+            </a:lvl2pPr>
+            <a:lvl3pPr marL="914400" algn="l" defTabSz="914400" rtl="0" eaLnBrk="1" latinLnBrk="0" hangingPunct="1">
+              <a:defRPr sz="1800" kern="1200">
+                <a:solidFill>
+                  <a:schemeClr val="tx1"/>
+                </a:solidFill>
+                <a:latin typeface="+mn-lt"/>
+                <a:ea typeface="+mn-ea"/>
+                <a:cs typeface="+mn-cs"/>
+              </a:defRPr>
+            </a:lvl3pPr>
+            <a:lvl4pPr marL="1371600" algn="l" defTabSz="914400" rtl="0" eaLnBrk="1" latinLnBrk="0" hangingPunct="1">
+              <a:defRPr sz="1800" kern="1200">
+                <a:solidFill>
+                  <a:schemeClr val="tx1"/>
+                </a:solidFill>
+                <a:latin typeface="+mn-lt"/>
+                <a:ea typeface="+mn-ea"/>
+                <a:cs typeface="+mn-cs"/>
+              </a:defRPr>
+            </a:lvl4pPr>
+            <a:lvl5pPr marL="1828800" algn="l" defTabSz="914400" rtl="0" eaLnBrk="1" latinLnBrk="0" hangingPunct="1">
+              <a:defRPr sz="1800" kern="1200">
+                <a:solidFill>
+                  <a:schemeClr val="tx1"/>
+                </a:solidFill>
+                <a:latin typeface="+mn-lt"/>
+                <a:ea typeface="+mn-ea"/>
+                <a:cs typeface="+mn-cs"/>
+              </a:defRPr>
+            </a:lvl5pPr>
+            <a:lvl6pPr marL="2286000" algn="l" defTabSz="914400" rtl="0" eaLnBrk="1" latinLnBrk="0" hangingPunct="1">
+              <a:defRPr sz="1800" kern="1200">
+                <a:solidFill>
+                  <a:schemeClr val="tx1"/>
+                </a:solidFill>
+                <a:latin typeface="+mn-lt"/>
+                <a:ea typeface="+mn-ea"/>
+                <a:cs typeface="+mn-cs"/>
+              </a:defRPr>
+            </a:lvl6pPr>
+            <a:lvl7pPr marL="2743200" algn="l" defTabSz="914400" rtl="0" eaLnBrk="1" latinLnBrk="0" hangingPunct="1">
+              <a:defRPr sz="1800" kern="1200">
+                <a:solidFill>
+                  <a:schemeClr val="tx1"/>
+                </a:solidFill>
+                <a:latin typeface="+mn-lt"/>
+                <a:ea typeface="+mn-ea"/>
+                <a:cs typeface="+mn-cs"/>
+              </a:defRPr>
+            </a:lvl7pPr>
+            <a:lvl8pPr marL="3200400" algn="l" defTabSz="914400" rtl="0" eaLnBrk="1" latinLnBrk="0" hangingPunct="1">
+              <a:defRPr sz="1800" kern="1200">
+                <a:solidFill>
+                  <a:schemeClr val="tx1"/>
+                </a:solidFill>
+                <a:latin typeface="+mn-lt"/>
+                <a:ea typeface="+mn-ea"/>
+                <a:cs typeface="+mn-cs"/>
+              </a:defRPr>
+            </a:lvl8pPr>
+            <a:lvl9pPr marL="3657600" algn="l" defTabSz="914400" rtl="0" eaLnBrk="1" latinLnBrk="0" hangingPunct="1">
+              <a:defRPr sz="1800" kern="1200">
+                <a:solidFill>
+                  <a:schemeClr val="tx1"/>
+                </a:solidFill>
+                <a:latin typeface="+mn-lt"/>
+                <a:ea typeface="+mn-ea"/>
+                <a:cs typeface="+mn-cs"/>
+              </a:defRPr>
+            </a:lvl9pPr>
+          </a:lstStyle>
           <a:p>
             <a:pPr>
               <a:spcAft>
@@ -10160,13 +9682,12 @@
               </a:spcAft>
             </a:pPr>
             <a:fld id="{C933FE9D-0909-4844-89F0-81DC191A89A0}" type="slidenum">
-              <a:rPr lang="en-US">
+              <a:rPr lang="en-US" smtClean="0">
                 <a:solidFill>
                   <a:schemeClr val="bg1">
                     <a:alpha val="80000"/>
                   </a:schemeClr>
                 </a:solidFill>
-                <a:latin typeface="+mn-lt"/>
               </a:rPr>
               <a:pPr>
                 <a:spcAft>
@@ -10181,7 +9702,6 @@
                   <a:alpha val="80000"/>
                 </a:schemeClr>
               </a:solidFill>
-              <a:latin typeface="+mn-lt"/>
             </a:endParaRPr>
           </a:p>
         </p:txBody>
@@ -10233,7 +9753,7 @@
       </p:grpSpPr>
       <p:sp>
         <p:nvSpPr>
-          <p:cNvPr id="67" name="Down Arrow 7">
+          <p:cNvPr id="69" name="Down Arrow 7">
             <a:extLst>
               <a:ext uri="{FF2B5EF4-FFF2-40B4-BE49-F238E27FC236}">
                 <a16:creationId xmlns:a16="http://schemas.microsoft.com/office/drawing/2014/main" id="{D4771268-CB57-404A-9271-370EB28F6090}"/>
@@ -10299,7 +9819,7 @@
       </p:sp>
       <p:sp>
         <p:nvSpPr>
-          <p:cNvPr id="61" name="PlaceHolder 1"/>
+          <p:cNvPr id="63" name="PlaceHolder 1"/>
           <p:cNvSpPr>
             <a:spLocks noGrp="1"/>
           </p:cNvSpPr>
@@ -10335,14 +9855,37 @@
                 <a:ea typeface="+mj-ea"/>
                 <a:cs typeface="+mj-cs"/>
               </a:rPr>
-              <a:t>2. Diákok, akik 2024 előtt regisztráltak és legalább egy kurzusra beiratkoztak</a:t>
+              <a:t>3. Kurzusok és azok oktatói, </a:t>
+            </a:r>
+            <a:br>
+              <a:rPr lang="en-US" sz="2300" kern="1200">
+                <a:solidFill>
+                  <a:srgbClr val="FFFFFF"/>
+                </a:solidFill>
+                <a:latin typeface="+mj-lt"/>
+                <a:ea typeface="+mj-ea"/>
+                <a:cs typeface="+mj-cs"/>
+              </a:rPr>
+            </a:br>
+            <a:r>
+              <a:rPr lang="en-US" sz="2300" b="1" u="none" strike="noStrike" kern="1200">
+                <a:solidFill>
+                  <a:srgbClr val="FFFFFF"/>
+                </a:solidFill>
+                <a:effectLst/>
+                <a:uFillTx/>
+                <a:latin typeface="+mj-lt"/>
+                <a:ea typeface="+mj-ea"/>
+                <a:cs typeface="+mj-cs"/>
+              </a:rPr>
+              <a:t>akik legalább 3 kurzust tanítanak</a:t>
             </a:r>
           </a:p>
         </p:txBody>
       </p:sp>
       <p:pic>
         <p:nvPicPr>
-          <p:cNvPr id="62" name="Kép 61"/>
+          <p:cNvPr id="64" name="Kép 63"/>
           <p:cNvPicPr/>
           <p:nvPr/>
         </p:nvPicPr>
@@ -10352,8 +9895,8 @@
         </p:blipFill>
         <p:spPr>
           <a:xfrm>
-            <a:off x="3949994" y="1236477"/>
-            <a:ext cx="5606438" cy="3195669"/>
+            <a:off x="3949994" y="907099"/>
+            <a:ext cx="5606438" cy="3854426"/>
           </a:xfrm>
           <a:prstGeom prst="rect">
             <a:avLst/>
@@ -10368,7 +9911,7 @@
             <a:spLocks noGrp="1"/>
           </p:cNvSpPr>
           <p:nvPr>
-            <p:ph type="sldNum" idx="6"/>
+            <p:ph type="sldNum" idx="9"/>
           </p:nvPr>
         </p:nvSpPr>
         <p:spPr>
@@ -10388,7 +9931,7 @@
                 <a:spcPts val="600"/>
               </a:spcAft>
             </a:pPr>
-            <a:fld id="{E901FB2A-B232-49FB-AC10-873A8FA8E86B}" type="slidenum">
+            <a:fld id="{B87A8573-86D2-47CB-8356-882D760F769D}" type="slidenum">
               <a:rPr lang="en-US" sz="1200">
                 <a:solidFill>
                   <a:schemeClr val="tx1">
@@ -10404,7 +9947,7 @@
               </a:pPr>
               <a:t>8</a:t>
             </a:fld>
-            <a:endParaRPr lang="en-US" sz="1200" dirty="0">
+            <a:endParaRPr lang="en-US" sz="1200">
               <a:solidFill>
                 <a:schemeClr val="tx1">
                   <a:alpha val="80000"/>
@@ -10420,7 +9963,7 @@
           <p:cNvPr id="2" name="PlaceHolder 2">
             <a:extLst>
               <a:ext uri="{FF2B5EF4-FFF2-40B4-BE49-F238E27FC236}">
-                <a16:creationId xmlns:a16="http://schemas.microsoft.com/office/drawing/2014/main" id="{C68702F4-E244-0979-171A-FEE457932DE5}"/>
+                <a16:creationId xmlns:a16="http://schemas.microsoft.com/office/drawing/2014/main" id="{0A544B01-2AFC-206A-6CB2-6C9EF3A22643}"/>
               </a:ext>
             </a:extLst>
           </p:cNvPr>
@@ -10437,6 +9980,10 @@
           <a:prstGeom prst="rect">
             <a:avLst/>
           </a:prstGeom>
+          <a:noFill/>
+          <a:ln w="0">
+            <a:noFill/>
+          </a:ln>
         </p:spPr>
         <p:txBody>
           <a:bodyPr vert="horz" lIns="91440" tIns="45720" rIns="91440" bIns="45720" rtlCol="0" anchor="ctr">
@@ -10446,12 +9993,15 @@
             <a:defPPr>
               <a:defRPr lang="hu-HU"/>
             </a:defPPr>
-            <a:lvl1pPr marL="0" algn="l" defTabSz="914400" rtl="0" eaLnBrk="1" latinLnBrk="0" hangingPunct="1">
-              <a:defRPr sz="1800" kern="1200">
-                <a:solidFill>
-                  <a:schemeClr val="tx1"/>
-                </a:solidFill>
-                <a:latin typeface="+mn-lt"/>
+            <a:lvl1pPr marL="0" indent="0" algn="r" defTabSz="914400" rtl="0" eaLnBrk="1" latinLnBrk="0" hangingPunct="1">
+              <a:buNone/>
+              <a:defRPr lang="hu-HU" sz="2600" b="0" u="none" strike="noStrike" kern="1200">
+                <a:solidFill>
+                  <a:srgbClr val="FFFFFF"/>
+                </a:solidFill>
+                <a:effectLst/>
+                <a:uFillTx/>
+                <a:latin typeface="Arial"/>
                 <a:ea typeface="+mn-ea"/>
                 <a:cs typeface="+mn-cs"/>
               </a:defRPr>
@@ -10550,6 +10100,7 @@
                     <a:alpha val="80000"/>
                   </a:schemeClr>
                 </a:solidFill>
+                <a:latin typeface="+mn-lt"/>
               </a:rPr>
               <a:pPr>
                 <a:spcAft>
@@ -10564,6 +10115,7 @@
                   <a:alpha val="80000"/>
                 </a:schemeClr>
               </a:solidFill>
+              <a:latin typeface="+mn-lt"/>
             </a:endParaRPr>
           </a:p>
         </p:txBody>
@@ -10601,7 +10153,13 @@
     </p:bg>
     <p:spTree>
       <p:nvGrpSpPr>
-        <p:cNvPr id="1" name=""/>
+        <p:cNvPr id="1" name="">
+          <a:extLst>
+            <a:ext uri="{FF2B5EF4-FFF2-40B4-BE49-F238E27FC236}">
+              <a16:creationId xmlns:a16="http://schemas.microsoft.com/office/drawing/2014/main" id="{71B4D62C-B95C-67A1-1D8F-1C5845364D5E}"/>
+            </a:ext>
+          </a:extLst>
+        </p:cNvPr>
         <p:cNvGrpSpPr/>
         <p:nvPr/>
       </p:nvGrpSpPr>
@@ -10681,7 +10239,13 @@
       </p:sp>
       <p:sp>
         <p:nvSpPr>
-          <p:cNvPr id="63" name="PlaceHolder 1"/>
+          <p:cNvPr id="63" name="PlaceHolder 1">
+            <a:extLst>
+              <a:ext uri="{FF2B5EF4-FFF2-40B4-BE49-F238E27FC236}">
+                <a16:creationId xmlns:a16="http://schemas.microsoft.com/office/drawing/2014/main" id="{238E0EC9-2E53-C0D9-36E3-9E3B32A2F6DD}"/>
+              </a:ext>
+            </a:extLst>
+          </p:cNvPr>
           <p:cNvSpPr>
             <a:spLocks noGrp="1"/>
           </p:cNvSpPr>
@@ -10747,7 +10311,13 @@
       </p:sp>
       <p:pic>
         <p:nvPicPr>
-          <p:cNvPr id="64" name="Kép 63"/>
+          <p:cNvPr id="64" name="Kép 63">
+            <a:extLst>
+              <a:ext uri="{FF2B5EF4-FFF2-40B4-BE49-F238E27FC236}">
+                <a16:creationId xmlns:a16="http://schemas.microsoft.com/office/drawing/2014/main" id="{F6D05772-670D-F412-08C2-3FDDFCBDBC3D}"/>
+              </a:ext>
+            </a:extLst>
+          </p:cNvPr>
           <p:cNvPicPr/>
           <p:nvPr/>
         </p:nvPicPr>
@@ -10768,7 +10338,13 @@
       </p:pic>
       <p:sp>
         <p:nvSpPr>
-          <p:cNvPr id="3" name="PlaceHolder 2"/>
+          <p:cNvPr id="3" name="PlaceHolder 2">
+            <a:extLst>
+              <a:ext uri="{FF2B5EF4-FFF2-40B4-BE49-F238E27FC236}">
+                <a16:creationId xmlns:a16="http://schemas.microsoft.com/office/drawing/2014/main" id="{2FC3D320-441A-56B3-4C11-D0AC98AD9366}"/>
+              </a:ext>
+            </a:extLst>
+          </p:cNvPr>
           <p:cNvSpPr>
             <a:spLocks noGrp="1"/>
           </p:cNvSpPr>
@@ -10825,7 +10401,7 @@
           <p:cNvPr id="2" name="PlaceHolder 2">
             <a:extLst>
               <a:ext uri="{FF2B5EF4-FFF2-40B4-BE49-F238E27FC236}">
-                <a16:creationId xmlns:a16="http://schemas.microsoft.com/office/drawing/2014/main" id="{0A544B01-2AFC-206A-6CB2-6C9EF3A22643}"/>
+                <a16:creationId xmlns:a16="http://schemas.microsoft.com/office/drawing/2014/main" id="{05D92EF1-4F51-3334-AD2C-181343490429}"/>
               </a:ext>
             </a:extLst>
           </p:cNvPr>
@@ -10836,8 +10412,8 @@
         </p:nvSpPr>
         <p:spPr>
           <a:xfrm>
-            <a:off x="9343794" y="4998820"/>
-            <a:ext cx="425275" cy="301905"/>
+            <a:off x="9023088" y="4998820"/>
+            <a:ext cx="745981" cy="301905"/>
           </a:xfrm>
           <a:prstGeom prst="rect">
             <a:avLst/>
@@ -10983,6 +10559,11 @@
         </p:txBody>
       </p:sp>
     </p:spTree>
+    <p:extLst>
+      <p:ext uri="{BB962C8B-B14F-4D97-AF65-F5344CB8AC3E}">
+        <p14:creationId xmlns:p14="http://schemas.microsoft.com/office/powerpoint/2010/main" val="3005154695"/>
+      </p:ext>
+    </p:extLst>
   </p:cSld>
   <p:clrMapOvr>
     <a:masterClrMapping/>

--- a/2024-25-13-evfolyam/ikt-I/masodik csoport munka.pptx
+++ b/2024-25-13-evfolyam/ikt-I/masodik csoport munka.pptx
@@ -5779,7 +5779,7 @@
         <p:fade/>
       </p:transition>
     </mc:Choice>
-    <mc:Fallback xmlns:p15="http://schemas.microsoft.com/office/powerpoint/2012/main" xmlns="">
+    <mc:Fallback xmlns="" xmlns:p15="http://schemas.microsoft.com/office/powerpoint/2012/main">
       <p:transition spd="slow">
         <p:fade/>
       </p:transition>
@@ -6147,7 +6147,7 @@
         <p:fade/>
       </p:transition>
     </mc:Choice>
-    <mc:Fallback xmlns:p15="http://schemas.microsoft.com/office/powerpoint/2012/main" xmlns="">
+    <mc:Fallback xmlns="" xmlns:p15="http://schemas.microsoft.com/office/powerpoint/2012/main">
       <p:transition spd="slow">
         <p:fade/>
       </p:transition>
@@ -6572,7 +6572,7 @@
         <p:fade/>
       </p:transition>
     </mc:Choice>
-    <mc:Fallback xmlns:p15="http://schemas.microsoft.com/office/powerpoint/2012/main" xmlns="">
+    <mc:Fallback xmlns="" xmlns:p15="http://schemas.microsoft.com/office/powerpoint/2012/main">
       <p:transition spd="slow">
         <p:fade/>
       </p:transition>
@@ -6828,7 +6828,7 @@
         <p:fade/>
       </p:transition>
     </mc:Choice>
-    <mc:Fallback xmlns:p15="http://schemas.microsoft.com/office/powerpoint/2012/main" xmlns="">
+    <mc:Fallback xmlns="" xmlns:p15="http://schemas.microsoft.com/office/powerpoint/2012/main">
       <p:transition spd="slow">
         <p:fade/>
       </p:transition>
@@ -6990,7 +6990,7 @@
         <p:fade/>
       </p:transition>
     </mc:Choice>
-    <mc:Fallback xmlns:p15="http://schemas.microsoft.com/office/powerpoint/2012/main" xmlns="">
+    <mc:Fallback xmlns="" xmlns:p15="http://schemas.microsoft.com/office/powerpoint/2012/main">
       <p:transition spd="slow">
         <p:fade/>
       </p:transition>
@@ -7152,7 +7152,7 @@
         <p:fade/>
       </p:transition>
     </mc:Choice>
-    <mc:Fallback xmlns:p15="http://schemas.microsoft.com/office/powerpoint/2012/main" xmlns="">
+    <mc:Fallback xmlns="" xmlns:p15="http://schemas.microsoft.com/office/powerpoint/2012/main">
       <p:transition spd="slow">
         <p:fade/>
       </p:transition>
@@ -7270,10 +7270,10 @@
       </p:sp>
       <p:pic>
         <p:nvPicPr>
-          <p:cNvPr id="5" name="Kép 4" descr="A képen szöveg, képernyőkép, diagram, tervezés látható&#10;&#10;Előfordulhat, hogy a mesterséges intelligencia által létrehozott tartalom helytelen.">
+          <p:cNvPr id="4" name="Kép 3" descr="A képen szöveg, diagram, képernyőkép, kör látható&#10;&#10;Előfordulhat, hogy a mesterséges intelligencia által létrehozott tartalom helytelen.">
             <a:extLst>
               <a:ext uri="{FF2B5EF4-FFF2-40B4-BE49-F238E27FC236}">
-                <a16:creationId xmlns:a16="http://schemas.microsoft.com/office/drawing/2014/main" id="{C8CE0BF8-A381-02F6-7806-1869D5331AF8}"/>
+                <a16:creationId xmlns:a16="http://schemas.microsoft.com/office/drawing/2014/main" id="{3ABA73B5-3B4C-68D3-3D77-85C428BEBA2F}"/>
               </a:ext>
             </a:extLst>
           </p:cNvPr>
@@ -7296,8 +7296,8 @@
         </p:blipFill>
         <p:spPr>
           <a:xfrm>
-            <a:off x="2442704" y="1122899"/>
-            <a:ext cx="4772025" cy="3924300"/>
+            <a:off x="1476861" y="979647"/>
+            <a:ext cx="5984421" cy="4453306"/>
           </a:xfrm>
           <a:prstGeom prst="rect">
             <a:avLst/>
@@ -7616,7 +7616,7 @@
         <p:fade/>
       </p:transition>
     </mc:Choice>
-    <mc:Fallback xmlns:p15="http://schemas.microsoft.com/office/powerpoint/2012/main" xmlns="">
+    <mc:Fallback xmlns="" xmlns:p15="http://schemas.microsoft.com/office/powerpoint/2012/main">
       <p:transition spd="slow">
         <p:fade/>
       </p:transition>
@@ -7731,7 +7731,7 @@
         </p:spPr>
         <p:txBody>
           <a:bodyPr lIns="0" tIns="0" rIns="0" bIns="0" anchor="t">
-            <a:normAutofit/>
+            <a:noAutofit/>
           </a:bodyPr>
           <a:lstStyle/>
           <a:p>
@@ -7742,14 +7742,14 @@
               <a:buNone/>
             </a:pPr>
             <a:r>
-              <a:rPr lang="hu-HU" sz="2400" b="1" u="none" strike="noStrike" dirty="0">
+              <a:rPr lang="hu-HU" b="1" u="none" strike="noStrike" dirty="0">
                 <a:effectLst/>
                 <a:uFillTx/>
                 <a:latin typeface="Arial"/>
               </a:rPr>
               <a:t>Mivel foglalkozik a cég?</a:t>
             </a:r>
-            <a:endParaRPr lang="hu-HU" sz="2400" b="0" u="none" strike="noStrike" dirty="0">
+            <a:endParaRPr lang="hu-HU" b="0" u="none" strike="noStrike" dirty="0">
               <a:effectLst/>
               <a:uFillTx/>
               <a:latin typeface="Arial"/>
@@ -7768,7 +7768,7 @@
               <a:buChar char=""/>
             </a:pPr>
             <a:r>
-              <a:rPr lang="hu-HU" sz="2400" b="0" u="none" strike="noStrike" dirty="0">
+              <a:rPr lang="hu-HU" b="0" u="none" strike="noStrike" dirty="0">
                 <a:effectLst/>
                 <a:uFillTx/>
                 <a:latin typeface="Arial"/>
@@ -7776,7 +7776,7 @@
               <a:t>Online </a:t>
             </a:r>
             <a:r>
-              <a:rPr lang="hu-HU" sz="2400" b="0" u="none" strike="noStrike" dirty="0" err="1">
+              <a:rPr lang="hu-HU" b="0" u="none" strike="noStrike" dirty="0" err="1">
                 <a:effectLst/>
                 <a:uFillTx/>
                 <a:latin typeface="Arial"/>
@@ -7784,7 +7784,7 @@
               <a:t>Kódólási</a:t>
             </a:r>
             <a:r>
-              <a:rPr lang="hu-HU" sz="2400" b="0" u="none" strike="noStrike" dirty="0">
+              <a:rPr lang="hu-HU" b="0" u="none" strike="noStrike" dirty="0">
                 <a:effectLst/>
                 <a:uFillTx/>
                 <a:latin typeface="Arial"/>
@@ -7792,14 +7792,14 @@
               <a:t> </a:t>
             </a:r>
             <a:r>
-              <a:rPr lang="hu-HU" sz="2400" b="0" u="none" strike="noStrike" dirty="0" err="1">
+              <a:rPr lang="hu-HU" b="0" u="none" strike="noStrike" dirty="0" err="1">
                 <a:effectLst/>
                 <a:uFillTx/>
                 <a:latin typeface="Arial"/>
               </a:rPr>
               <a:t>Kurzosok</a:t>
             </a:r>
-            <a:endParaRPr lang="hu-HU" sz="2400" b="0" u="none" strike="noStrike" dirty="0">
+            <a:endParaRPr lang="hu-HU" b="0" u="none" strike="noStrike" dirty="0">
               <a:effectLst/>
               <a:uFillTx/>
               <a:latin typeface="Arial"/>
@@ -7818,7 +7818,7 @@
               <a:buChar char=""/>
             </a:pPr>
             <a:r>
-              <a:rPr lang="hu-HU" sz="2400" b="0" u="none" strike="noStrike" dirty="0">
+              <a:rPr lang="hu-HU" b="0" u="none" strike="noStrike" dirty="0">
                 <a:effectLst/>
                 <a:uFillTx/>
                 <a:latin typeface="Arial"/>
@@ -7839,7 +7839,7 @@
               <a:buChar char=""/>
             </a:pPr>
             <a:r>
-              <a:rPr lang="hu-HU" sz="2400" b="0" u="none" strike="noStrike" dirty="0">
+              <a:rPr lang="hu-HU" b="0" u="none" strike="noStrike" dirty="0">
                 <a:effectLst/>
                 <a:uFillTx/>
                 <a:latin typeface="Arial"/>
@@ -7860,7 +7860,7 @@
               <a:buChar char=""/>
             </a:pPr>
             <a:r>
-              <a:rPr lang="hu-HU" sz="2400" b="0" u="none" strike="noStrike" dirty="0">
+              <a:rPr lang="hu-HU" b="0" u="none" strike="noStrike" dirty="0">
                 <a:effectLst/>
                 <a:uFillTx/>
                 <a:latin typeface="Arial"/>
@@ -7904,7 +7904,7 @@
         <p:fade/>
       </p:transition>
     </mc:Choice>
-    <mc:Fallback xmlns:p15="http://schemas.microsoft.com/office/powerpoint/2012/main" xmlns="">
+    <mc:Fallback xmlns="" xmlns:p15="http://schemas.microsoft.com/office/powerpoint/2012/main">
       <p:transition spd="slow">
         <p:fade/>
       </p:transition>
@@ -8004,7 +8004,7 @@
         </p:nvSpPr>
         <p:spPr>
           <a:xfrm>
-            <a:off x="504000" y="1515240"/>
+            <a:off x="-116485" y="1501095"/>
             <a:ext cx="9072000" cy="3288600"/>
           </a:xfrm>
           <a:prstGeom prst="rect">
@@ -8021,14 +8021,14 @@
           </a:bodyPr>
           <a:lstStyle/>
           <a:p>
-            <a:pPr marL="432000" indent="0" algn="just">
+            <a:pPr marL="432000" indent="0" algn="ctr">
               <a:spcAft>
                 <a:spcPts val="856"/>
               </a:spcAft>
               <a:buNone/>
             </a:pPr>
             <a:r>
-              <a:rPr lang="en-US" sz="2400" b="1" u="none" strike="noStrike" dirty="0">
+              <a:rPr lang="en-US" sz="4000" b="1" u="none" strike="noStrike" dirty="0">
                 <a:effectLst/>
                 <a:uFillTx/>
                 <a:latin typeface="Arial"/>
@@ -8036,7 +8036,7 @@
               <a:t>A </a:t>
             </a:r>
             <a:r>
-              <a:rPr lang="en-US" sz="2400" b="1" u="none" strike="noStrike" dirty="0" err="1">
+              <a:rPr lang="en-US" sz="4000" b="1" u="none" strike="noStrike" dirty="0" err="1">
                 <a:effectLst/>
                 <a:uFillTx/>
                 <a:latin typeface="Arial"/>
@@ -8044,7 +8044,7 @@
               <a:t>csapat</a:t>
             </a:r>
             <a:r>
-              <a:rPr lang="hu-HU" sz="2400" b="1" u="none" strike="noStrike" dirty="0">
+              <a:rPr lang="hu-HU" sz="4000" b="1" u="none" strike="noStrike" dirty="0">
                 <a:effectLst/>
                 <a:uFillTx/>
                 <a:latin typeface="Arial"/>
@@ -8053,7 +8053,7 @@
             </a:r>
           </a:p>
           <a:p>
-            <a:pPr lvl="1" algn="l" rtl="0" eaLnBrk="0" fontAlgn="base" hangingPunct="0">
+            <a:pPr lvl="1" algn="ctr" rtl="0" eaLnBrk="0" fontAlgn="base" hangingPunct="0">
               <a:spcBef>
                 <a:spcPct val="0"/>
               </a:spcBef>
@@ -8062,7 +8062,7 @@
               </a:spcAft>
             </a:pPr>
             <a:r>
-              <a:rPr kumimoji="0" lang="hu-HU" altLang="hu-HU" sz="2000" b="1" i="0" u="none" strike="noStrike" cap="none" normalizeH="0" baseline="0" dirty="0">
+              <a:rPr kumimoji="0" lang="hu-HU" altLang="hu-HU" sz="4000" b="1" i="0" u="none" strike="noStrike" cap="none" normalizeH="0" baseline="0" dirty="0">
                 <a:ln>
                   <a:noFill/>
                 </a:ln>
@@ -8072,76 +8072,11 @@
                 <a:effectLst/>
                 <a:latin typeface="Arial" panose="020B0604020202020204" pitchFamily="34" charset="0"/>
               </a:rPr>
-              <a:t>	- Dávid, a frontendes mester</a:t>
-            </a:r>
-            <a:r>
-              <a:rPr kumimoji="0" lang="hu-HU" altLang="hu-HU" sz="2000" b="0" i="0" u="none" strike="noStrike" cap="none" normalizeH="0" baseline="0" dirty="0">
-                <a:ln>
-                  <a:noFill/>
-                </a:ln>
-                <a:solidFill>
-                  <a:schemeClr val="tx1"/>
-                </a:solidFill>
-                <a:effectLst/>
-                <a:latin typeface="Arial" panose="020B0604020202020204" pitchFamily="34" charset="0"/>
-              </a:rPr>
-              <a:t> – </a:t>
-            </a:r>
-            <a:r>
-              <a:rPr kumimoji="0" lang="hu-HU" altLang="hu-HU" sz="2000" b="0" i="0" u="none" strike="noStrike" cap="none" normalizeH="0" baseline="0" dirty="0" err="1">
-                <a:ln>
-                  <a:noFill/>
-                </a:ln>
-                <a:solidFill>
-                  <a:schemeClr val="tx1"/>
-                </a:solidFill>
-                <a:effectLst/>
-                <a:latin typeface="Arial" panose="020B0604020202020204" pitchFamily="34" charset="0"/>
-              </a:rPr>
-              <a:t>React</a:t>
-            </a:r>
-            <a:r>
-              <a:rPr kumimoji="0" lang="hu-HU" altLang="hu-HU" sz="2000" b="0" i="0" u="none" strike="noStrike" cap="none" normalizeH="0" baseline="0" dirty="0">
-                <a:ln>
-                  <a:noFill/>
-                </a:ln>
-                <a:solidFill>
-                  <a:schemeClr val="tx1"/>
-                </a:solidFill>
-                <a:effectLst/>
-                <a:latin typeface="Arial" panose="020B0604020202020204" pitchFamily="34" charset="0"/>
-              </a:rPr>
-              <a:t>-ben nyomja, és minden CSS-		</a:t>
-            </a:r>
-            <a:r>
-              <a:rPr kumimoji="0" lang="hu-HU" altLang="hu-HU" sz="2000" b="0" i="0" u="none" strike="noStrike" cap="none" normalizeH="0" baseline="0" dirty="0" err="1">
-                <a:ln>
-                  <a:noFill/>
-                </a:ln>
-                <a:solidFill>
-                  <a:schemeClr val="tx1"/>
-                </a:solidFill>
-                <a:effectLst/>
-                <a:latin typeface="Arial" panose="020B0604020202020204" pitchFamily="34" charset="0"/>
-              </a:rPr>
-              <a:t>bugra</a:t>
-            </a:r>
-            <a:r>
-              <a:rPr kumimoji="0" lang="hu-HU" altLang="hu-HU" sz="2000" b="0" i="0" u="none" strike="noStrike" cap="none" normalizeH="0" baseline="0" dirty="0">
-                <a:ln>
-                  <a:noFill/>
-                </a:ln>
-                <a:solidFill>
-                  <a:schemeClr val="tx1"/>
-                </a:solidFill>
-                <a:effectLst/>
-                <a:latin typeface="Arial" panose="020B0604020202020204" pitchFamily="34" charset="0"/>
-              </a:rPr>
-              <a:t> van egy megoldása</a:t>
-            </a:r>
-          </a:p>
-          <a:p>
-            <a:pPr lvl="1" algn="l" rtl="0" eaLnBrk="0" fontAlgn="base" hangingPunct="0">
+              <a:t>	 - Kincső, a projektvezető</a:t>
+            </a:r>
+          </a:p>
+          <a:p>
+            <a:pPr lvl="1" algn="ctr" rtl="0" eaLnBrk="0" fontAlgn="base" hangingPunct="0">
               <a:spcBef>
                 <a:spcPct val="0"/>
               </a:spcBef>
@@ -8150,7 +8085,16 @@
               </a:spcAft>
             </a:pPr>
             <a:r>
-              <a:rPr kumimoji="0" lang="hu-HU" altLang="hu-HU" sz="2000" b="1" i="0" u="none" strike="noStrike" cap="none" normalizeH="0" baseline="0" dirty="0">
+              <a:rPr lang="hu-HU" altLang="hu-HU" sz="4000" b="1" dirty="0">
+                <a:solidFill>
+                  <a:schemeClr val="tx1"/>
+                </a:solidFill>
+                <a:latin typeface="Arial" panose="020B0604020202020204" pitchFamily="34" charset="0"/>
+              </a:rPr>
+              <a:t>	</a:t>
+            </a:r>
+            <a:r>
+              <a:rPr kumimoji="0" lang="hu-HU" altLang="hu-HU" sz="4000" b="1" i="0" u="none" strike="noStrike" cap="none" normalizeH="0" baseline="0" dirty="0">
                 <a:ln>
                   <a:noFill/>
                 </a:ln>
@@ -8160,24 +8104,17 @@
                 <a:effectLst/>
                 <a:latin typeface="Arial" panose="020B0604020202020204" pitchFamily="34" charset="0"/>
               </a:rPr>
-              <a:t>	- Ádám, a Python mágus</a:t>
-            </a:r>
-            <a:r>
-              <a:rPr kumimoji="0" lang="hu-HU" altLang="hu-HU" sz="2000" b="0" i="0" u="none" strike="noStrike" cap="none" normalizeH="0" baseline="0" dirty="0">
-                <a:ln>
-                  <a:noFill/>
-                </a:ln>
-                <a:solidFill>
-                  <a:schemeClr val="tx1"/>
-                </a:solidFill>
-                <a:effectLst/>
-                <a:latin typeface="Arial" panose="020B0604020202020204" pitchFamily="34" charset="0"/>
-              </a:rPr>
-              <a:t> – adatbázisok és AI modellek a specialitása</a:t>
-            </a:r>
-          </a:p>
-          <a:p>
-            <a:pPr lvl="1" algn="l" rtl="0" eaLnBrk="0" fontAlgn="base" hangingPunct="0">
+              <a:t>- Dávid, a frontendes mester</a:t>
+            </a:r>
+            <a:endParaRPr lang="hu-HU" altLang="hu-HU" sz="4000" dirty="0">
+              <a:solidFill>
+                <a:schemeClr val="tx1"/>
+              </a:solidFill>
+              <a:latin typeface="Arial" panose="020B0604020202020204" pitchFamily="34" charset="0"/>
+            </a:endParaRPr>
+          </a:p>
+          <a:p>
+            <a:pPr lvl="1" algn="ctr" rtl="0" eaLnBrk="0" fontAlgn="base" hangingPunct="0">
               <a:spcBef>
                 <a:spcPct val="0"/>
               </a:spcBef>
@@ -8186,7 +8123,7 @@
               </a:spcAft>
             </a:pPr>
             <a:r>
-              <a:rPr kumimoji="0" lang="hu-HU" altLang="hu-HU" sz="2000" b="1" i="0" u="none" strike="noStrike" cap="none" normalizeH="0" baseline="0" dirty="0">
+              <a:rPr kumimoji="0" lang="hu-HU" altLang="hu-HU" sz="4000" b="1" i="0" u="none" strike="noStrike" cap="none" normalizeH="0" baseline="0" dirty="0">
                 <a:ln>
                   <a:noFill/>
                 </a:ln>
@@ -8196,50 +8133,21 @@
                 <a:effectLst/>
                 <a:latin typeface="Arial" panose="020B0604020202020204" pitchFamily="34" charset="0"/>
               </a:rPr>
-              <a:t>	- </a:t>
-            </a:r>
-            <a:r>
-              <a:rPr kumimoji="0" lang="hu-HU" altLang="hu-HU" sz="2000" b="1" i="0" u="none" strike="noStrike" cap="none" normalizeH="0" baseline="0" dirty="0" err="1">
-                <a:ln>
-                  <a:noFill/>
-                </a:ln>
-                <a:solidFill>
-                  <a:schemeClr val="tx1"/>
-                </a:solidFill>
-                <a:effectLst/>
-                <a:latin typeface="Arial" panose="020B0604020202020204" pitchFamily="34" charset="0"/>
-              </a:rPr>
-              <a:t>BalázsBot</a:t>
-            </a:r>
-            <a:r>
-              <a:rPr kumimoji="0" lang="hu-HU" altLang="hu-HU" sz="2000" b="1" i="0" u="none" strike="noStrike" cap="none" normalizeH="0" baseline="0" dirty="0">
-                <a:ln>
-                  <a:noFill/>
-                </a:ln>
-                <a:solidFill>
-                  <a:schemeClr val="tx1"/>
-                </a:solidFill>
-                <a:effectLst/>
-                <a:latin typeface="Arial" panose="020B0604020202020204" pitchFamily="34" charset="0"/>
-              </a:rPr>
-              <a:t>, a humoros AI mentor</a:t>
-            </a:r>
-            <a:r>
-              <a:rPr kumimoji="0" lang="hu-HU" altLang="hu-HU" sz="2000" b="0" i="0" u="none" strike="noStrike" cap="none" normalizeH="0" baseline="0" dirty="0">
-                <a:ln>
-                  <a:noFill/>
-                </a:ln>
-                <a:solidFill>
-                  <a:schemeClr val="tx1"/>
-                </a:solidFill>
-                <a:effectLst/>
-                <a:latin typeface="Arial" panose="020B0604020202020204" pitchFamily="34" charset="0"/>
-              </a:rPr>
-              <a:t> – mindig segít, de néha fura 		válaszokat ad.</a:t>
-            </a:r>
-          </a:p>
-          <a:p>
-            <a:pPr lvl="1" algn="l" rtl="0" eaLnBrk="0" fontAlgn="base" hangingPunct="0">
+              <a:t>	- Ádám, a Python mágus</a:t>
+            </a:r>
+            <a:endParaRPr kumimoji="0" lang="hu-HU" altLang="hu-HU" sz="4000" b="0" i="0" u="none" strike="noStrike" cap="none" normalizeH="0" baseline="0" dirty="0">
+              <a:ln>
+                <a:noFill/>
+              </a:ln>
+              <a:solidFill>
+                <a:schemeClr val="tx1"/>
+              </a:solidFill>
+              <a:effectLst/>
+              <a:latin typeface="Arial" panose="020B0604020202020204" pitchFamily="34" charset="0"/>
+            </a:endParaRPr>
+          </a:p>
+          <a:p>
+            <a:pPr lvl="1" algn="ctr" rtl="0" eaLnBrk="0" fontAlgn="base" hangingPunct="0">
               <a:spcBef>
                 <a:spcPct val="0"/>
               </a:spcBef>
@@ -8248,7 +8156,7 @@
               </a:spcAft>
             </a:pPr>
             <a:r>
-              <a:rPr kumimoji="0" lang="hu-HU" altLang="hu-HU" sz="2000" b="1" i="0" u="none" strike="noStrike" cap="none" normalizeH="0" baseline="0" dirty="0">
+              <a:rPr kumimoji="0" lang="hu-HU" altLang="hu-HU" sz="4000" b="1" i="0" u="none" strike="noStrike" cap="none" normalizeH="0" baseline="0" dirty="0">
                 <a:ln>
                   <a:noFill/>
                 </a:ln>
@@ -8258,10 +8166,10 @@
                 <a:effectLst/>
                 <a:latin typeface="Arial" panose="020B0604020202020204" pitchFamily="34" charset="0"/>
               </a:rPr>
-              <a:t>	- Kincső, a projektvezető</a:t>
-            </a:r>
-            <a:r>
-              <a:rPr kumimoji="0" lang="hu-HU" altLang="hu-HU" sz="2000" b="0" i="0" u="none" strike="noStrike" cap="none" normalizeH="0" baseline="0" dirty="0">
+              <a:t>	- </a:t>
+            </a:r>
+            <a:r>
+              <a:rPr kumimoji="0" lang="hu-HU" altLang="hu-HU" sz="4000" b="1" i="0" u="none" strike="noStrike" cap="none" normalizeH="0" baseline="0" dirty="0" err="1">
                 <a:ln>
                   <a:noFill/>
                 </a:ln>
@@ -8271,10 +8179,10 @@
                 <a:effectLst/>
                 <a:latin typeface="Arial" panose="020B0604020202020204" pitchFamily="34" charset="0"/>
               </a:rPr>
-              <a:t> – mindent egyben tart, még az éjféli 			</a:t>
-            </a:r>
-            <a:r>
-              <a:rPr kumimoji="0" lang="hu-HU" altLang="hu-HU" sz="2000" b="0" i="0" u="none" strike="noStrike" cap="none" normalizeH="0" baseline="0" dirty="0" err="1">
+              <a:t>BalázsBot</a:t>
+            </a:r>
+            <a:r>
+              <a:rPr kumimoji="0" lang="hu-HU" altLang="hu-HU" sz="4000" b="1" i="0" u="none" strike="noStrike" cap="none" normalizeH="0" baseline="0" dirty="0">
                 <a:ln>
                   <a:noFill/>
                 </a:ln>
@@ -8284,10 +8192,19 @@
                 <a:effectLst/>
                 <a:latin typeface="Arial" panose="020B0604020202020204" pitchFamily="34" charset="0"/>
               </a:rPr>
-              <a:t>deployokat</a:t>
-            </a:r>
-            <a:r>
-              <a:rPr kumimoji="0" lang="hu-HU" altLang="hu-HU" sz="2000" b="0" i="0" u="none" strike="noStrike" cap="none" normalizeH="0" baseline="0" dirty="0">
+              <a:t>, </a:t>
+            </a:r>
+            <a:r>
+              <a:rPr lang="hu-HU" altLang="hu-HU" sz="4000" b="1" dirty="0">
+                <a:solidFill>
+                  <a:schemeClr val="tx1"/>
+                </a:solidFill>
+                <a:latin typeface="Arial" panose="020B0604020202020204" pitchFamily="34" charset="0"/>
+              </a:rPr>
+              <a:t>az </a:t>
+            </a:r>
+            <a:r>
+              <a:rPr kumimoji="0" lang="hu-HU" altLang="hu-HU" sz="4000" b="1" i="0" u="none" strike="noStrike" cap="none" normalizeH="0" baseline="0" dirty="0">
                 <a:ln>
                   <a:noFill/>
                 </a:ln>
@@ -8297,7 +8214,7 @@
                 <a:effectLst/>
                 <a:latin typeface="Arial" panose="020B0604020202020204" pitchFamily="34" charset="0"/>
               </a:rPr>
-              <a:t> is </a:t>
+              <a:t>AI mentor</a:t>
             </a:r>
           </a:p>
         </p:txBody>
@@ -8352,7 +8269,7 @@
         <p:fade/>
       </p:transition>
     </mc:Choice>
-    <mc:Fallback xmlns:p15="http://schemas.microsoft.com/office/powerpoint/2012/main" xmlns="">
+    <mc:Fallback xmlns="" xmlns:p15="http://schemas.microsoft.com/office/powerpoint/2012/main">
       <p:transition spd="slow">
         <p:fade/>
       </p:transition>
@@ -9106,7 +9023,7 @@
         <p:fade/>
       </p:transition>
     </mc:Choice>
-    <mc:Fallback xmlns:p15="http://schemas.microsoft.com/office/powerpoint/2012/main" xmlns="">
+    <mc:Fallback xmlns="" xmlns:p15="http://schemas.microsoft.com/office/powerpoint/2012/main">
       <p:transition spd="slow">
         <p:fade/>
       </p:transition>
@@ -9335,7 +9252,7 @@
         <p:fade/>
       </p:transition>
     </mc:Choice>
-    <mc:Fallback xmlns:p15="http://schemas.microsoft.com/office/powerpoint/2012/main" xmlns="">
+    <mc:Fallback xmlns="" xmlns:p15="http://schemas.microsoft.com/office/powerpoint/2012/main">
       <p:transition spd="slow">
         <p:fade/>
       </p:transition>
@@ -9717,7 +9634,7 @@
         <p:fade/>
       </p:transition>
     </mc:Choice>
-    <mc:Fallback xmlns:p15="http://schemas.microsoft.com/office/powerpoint/2012/main" xmlns="">
+    <mc:Fallback xmlns="" xmlns:p15="http://schemas.microsoft.com/office/powerpoint/2012/main">
       <p:transition spd="slow">
         <p:fade/>
       </p:transition>
@@ -10131,7 +10048,7 @@
         <p:fade/>
       </p:transition>
     </mc:Choice>
-    <mc:Fallback xmlns:p15="http://schemas.microsoft.com/office/powerpoint/2012/main" xmlns="">
+    <mc:Fallback xmlns="" xmlns:p15="http://schemas.microsoft.com/office/powerpoint/2012/main">
       <p:transition spd="slow">
         <p:fade/>
       </p:transition>
@@ -10574,7 +10491,7 @@
         <p:fade/>
       </p:transition>
     </mc:Choice>
-    <mc:Fallback xmlns:p15="http://schemas.microsoft.com/office/powerpoint/2012/main" xmlns="">
+    <mc:Fallback xmlns="" xmlns:p15="http://schemas.microsoft.com/office/powerpoint/2012/main">
       <p:transition spd="slow">
         <p:fade/>
       </p:transition>
